--- a/presentation/Netflix_Strategy_Analysis.pptx
+++ b/presentation/Netflix_Strategy_Analysis.pptx
@@ -5,25 +5,26 @@
     <p:sldMasterId id="2147483648" r:id="rId1"/>
   </p:sldMasterIdLst>
   <p:notesMasterIdLst>
-    <p:notesMasterId r:id="rId10"/>
+    <p:notesMasterId r:id="rId11"/>
   </p:notesMasterIdLst>
   <p:handoutMasterIdLst>
-    <p:handoutMasterId r:id="rId11"/>
+    <p:handoutMasterId r:id="rId12"/>
   </p:handoutMasterIdLst>
   <p:sldIdLst>
     <p:sldId id="316" r:id="rId2"/>
     <p:sldId id="320" r:id="rId3"/>
     <p:sldId id="307" r:id="rId4"/>
     <p:sldId id="322" r:id="rId5"/>
-    <p:sldId id="313" r:id="rId6"/>
-    <p:sldId id="319" r:id="rId7"/>
-    <p:sldId id="317" r:id="rId8"/>
-    <p:sldId id="323" r:id="rId9"/>
+    <p:sldId id="324" r:id="rId6"/>
+    <p:sldId id="313" r:id="rId7"/>
+    <p:sldId id="319" r:id="rId8"/>
+    <p:sldId id="317" r:id="rId9"/>
+    <p:sldId id="323" r:id="rId10"/>
   </p:sldIdLst>
   <p:sldSz cx="12192000" cy="6858000"/>
   <p:notesSz cx="6858000" cy="9144000"/>
   <p:custDataLst>
-    <p:tags r:id="rId12"/>
+    <p:tags r:id="rId13"/>
   </p:custDataLst>
   <p:defaultTextStyle>
     <a:defPPr>
@@ -236,7 +237,7 @@
           <a:p>
             <a:fld id="{576C422E-181F-4E69-B889-4841EA1EE446}" type="datetimeFigureOut">
               <a:rPr lang="en-ID" smtClean="0"/>
-              <a:t>26/07/2026</a:t>
+              <a:t>29/07/2026</a:t>
             </a:fld>
             <a:endParaRPr lang="en-ID"/>
           </a:p>
@@ -413,7 +414,7 @@
           <a:p>
             <a:fld id="{620B7041-6594-4BE2-8703-78B4E00C91E5}" type="datetimeFigureOut">
               <a:rPr lang="en-ID" smtClean="0"/>
-              <a:t>26/07/2026</a:t>
+              <a:t>29/07/2026</a:t>
             </a:fld>
             <a:endParaRPr lang="en-ID"/>
           </a:p>
@@ -743,95 +744,7 @@
           <a:bodyPr/>
           <a:lstStyle/>
           <a:p>
-            <a:r>
-              <a:rPr lang="en-ID" sz="1200" b="0" i="0" u="none" strike="noStrike" kern="1200" dirty="0">
-                <a:solidFill>
-                  <a:schemeClr val="tx1"/>
-                </a:solidFill>
-                <a:effectLst/>
-                <a:latin typeface="+mn-lt"/>
-                <a:ea typeface="+mn-ea"/>
-                <a:cs typeface="+mn-cs"/>
-              </a:rPr>
-              <a:t>Photo by </a:t>
-            </a:r>
-            <a:r>
-              <a:rPr lang="en-ID" sz="1200" b="1" i="0" u="none" strike="noStrike" kern="1200" dirty="0">
-                <a:solidFill>
-                  <a:schemeClr val="tx1"/>
-                </a:solidFill>
-                <a:effectLst/>
-                <a:latin typeface="+mn-lt"/>
-                <a:ea typeface="+mn-ea"/>
-                <a:cs typeface="+mn-cs"/>
-                <a:hlinkClick r:id="rId3"/>
-              </a:rPr>
-              <a:t>Andrea Piacquadio</a:t>
-            </a:r>
-            <a:r>
-              <a:rPr lang="en-ID" sz="1200" b="0" i="0" u="none" strike="noStrike" kern="1200" dirty="0">
-                <a:solidFill>
-                  <a:schemeClr val="tx1"/>
-                </a:solidFill>
-                <a:effectLst/>
-                <a:latin typeface="+mn-lt"/>
-                <a:ea typeface="+mn-ea"/>
-                <a:cs typeface="+mn-cs"/>
-              </a:rPr>
-              <a:t> from </a:t>
-            </a:r>
-            <a:r>
-              <a:rPr lang="en-ID" sz="1200" b="1" i="0" u="none" strike="noStrike" kern="1200" dirty="0">
-                <a:solidFill>
-                  <a:schemeClr val="tx1"/>
-                </a:solidFill>
-                <a:effectLst/>
-                <a:latin typeface="+mn-lt"/>
-                <a:ea typeface="+mn-ea"/>
-                <a:cs typeface="+mn-cs"/>
-                <a:hlinkClick r:id="rId4"/>
-              </a:rPr>
-              <a:t>Pexels</a:t>
-            </a:r>
-            <a:endParaRPr lang="en-ID" sz="1200" b="1" i="0" u="none" strike="noStrike" kern="1200" dirty="0">
-              <a:solidFill>
-                <a:schemeClr val="tx1"/>
-              </a:solidFill>
-              <a:effectLst/>
-              <a:latin typeface="+mn-lt"/>
-              <a:ea typeface="+mn-ea"/>
-              <a:cs typeface="+mn-cs"/>
-            </a:endParaRPr>
-          </a:p>
-          <a:p>
-            <a:r>
-              <a:rPr lang="en-US" dirty="0"/>
-              <a:t>Content: https://</a:t>
-            </a:r>
-            <a:r>
-              <a:rPr lang="en-US" dirty="0" err="1"/>
-              <a:t>prezi.com</a:t>
-            </a:r>
-            <a:r>
-              <a:rPr lang="en-US" dirty="0"/>
-              <a:t>/</a:t>
-            </a:r>
-            <a:r>
-              <a:rPr lang="en-US" dirty="0" err="1"/>
-              <a:t>nmedogats-xq</a:t>
-            </a:r>
-            <a:r>
-              <a:rPr lang="en-US" dirty="0"/>
-              <a:t>/</a:t>
-            </a:r>
-            <a:r>
-              <a:rPr lang="en-US" dirty="0" err="1"/>
-              <a:t>netflix</a:t>
-            </a:r>
-            <a:r>
-              <a:rPr lang="en-US" dirty="0"/>
-              <a:t>-presentation/</a:t>
-            </a:r>
+            <a:endParaRPr lang="en-US" dirty="0"/>
           </a:p>
         </p:txBody>
       </p:sp>
@@ -939,56 +852,6 @@
           <a:bodyPr/>
           <a:lstStyle/>
           <a:p>
-            <a:r>
-              <a:rPr lang="en-ID" sz="1200" b="0" i="0" u="none" strike="noStrike" kern="1200" dirty="0">
-                <a:solidFill>
-                  <a:schemeClr val="tx1"/>
-                </a:solidFill>
-                <a:effectLst/>
-                <a:latin typeface="+mn-lt"/>
-                <a:ea typeface="+mn-ea"/>
-                <a:cs typeface="+mn-cs"/>
-              </a:rPr>
-              <a:t>Photo by </a:t>
-            </a:r>
-            <a:r>
-              <a:rPr lang="en-ID" sz="1200" b="1" i="0" u="none" strike="noStrike" kern="1200" dirty="0">
-                <a:solidFill>
-                  <a:schemeClr val="tx1"/>
-                </a:solidFill>
-                <a:effectLst/>
-                <a:latin typeface="+mn-lt"/>
-                <a:ea typeface="+mn-ea"/>
-                <a:cs typeface="+mn-cs"/>
-                <a:hlinkClick r:id="rId3"/>
-              </a:rPr>
-              <a:t>JESHOOTS.com</a:t>
-            </a:r>
-            <a:r>
-              <a:rPr lang="en-ID" sz="1200" b="0" i="0" u="none" strike="noStrike" kern="1200" dirty="0">
-                <a:solidFill>
-                  <a:schemeClr val="tx1"/>
-                </a:solidFill>
-                <a:effectLst/>
-                <a:latin typeface="+mn-lt"/>
-                <a:ea typeface="+mn-ea"/>
-                <a:cs typeface="+mn-cs"/>
-              </a:rPr>
-              <a:t> from </a:t>
-            </a:r>
-            <a:r>
-              <a:rPr lang="en-ID" sz="1200" b="1" i="0" u="none" strike="noStrike" kern="1200" dirty="0">
-                <a:solidFill>
-                  <a:schemeClr val="tx1"/>
-                </a:solidFill>
-                <a:effectLst/>
-                <a:latin typeface="+mn-lt"/>
-                <a:ea typeface="+mn-ea"/>
-                <a:cs typeface="+mn-cs"/>
-                <a:hlinkClick r:id="rId4"/>
-              </a:rPr>
-              <a:t>Pexels</a:t>
-            </a:r>
             <a:endParaRPr lang="en-US" dirty="0"/>
           </a:p>
         </p:txBody>
@@ -1079,56 +942,6 @@
           <a:bodyPr/>
           <a:lstStyle/>
           <a:p>
-            <a:r>
-              <a:rPr lang="en-ID" sz="1200" b="0" i="0" u="none" strike="noStrike" kern="1200" dirty="0">
-                <a:solidFill>
-                  <a:schemeClr val="tx1"/>
-                </a:solidFill>
-                <a:effectLst/>
-                <a:latin typeface="+mn-lt"/>
-                <a:ea typeface="+mn-ea"/>
-                <a:cs typeface="+mn-cs"/>
-              </a:rPr>
-              <a:t>Photo by </a:t>
-            </a:r>
-            <a:r>
-              <a:rPr lang="en-ID" sz="1200" b="1" i="0" u="none" strike="noStrike" kern="1200" dirty="0">
-                <a:solidFill>
-                  <a:schemeClr val="tx1"/>
-                </a:solidFill>
-                <a:effectLst/>
-                <a:latin typeface="+mn-lt"/>
-                <a:ea typeface="+mn-ea"/>
-                <a:cs typeface="+mn-cs"/>
-                <a:hlinkClick r:id="rId3"/>
-              </a:rPr>
-              <a:t>JESHOOTS.com</a:t>
-            </a:r>
-            <a:r>
-              <a:rPr lang="en-ID" sz="1200" b="0" i="0" u="none" strike="noStrike" kern="1200" dirty="0">
-                <a:solidFill>
-                  <a:schemeClr val="tx1"/>
-                </a:solidFill>
-                <a:effectLst/>
-                <a:latin typeface="+mn-lt"/>
-                <a:ea typeface="+mn-ea"/>
-                <a:cs typeface="+mn-cs"/>
-              </a:rPr>
-              <a:t> from </a:t>
-            </a:r>
-            <a:r>
-              <a:rPr lang="en-ID" sz="1200" b="1" i="0" u="none" strike="noStrike" kern="1200" dirty="0">
-                <a:solidFill>
-                  <a:schemeClr val="tx1"/>
-                </a:solidFill>
-                <a:effectLst/>
-                <a:latin typeface="+mn-lt"/>
-                <a:ea typeface="+mn-ea"/>
-                <a:cs typeface="+mn-cs"/>
-                <a:hlinkClick r:id="rId4"/>
-              </a:rPr>
-              <a:t>Pexels</a:t>
-            </a:r>
             <a:endParaRPr lang="en-US" dirty="0"/>
           </a:p>
         </p:txBody>
@@ -1231,56 +1044,6 @@
           <a:bodyPr/>
           <a:lstStyle/>
           <a:p>
-            <a:r>
-              <a:rPr lang="en-ID" sz="1200" b="0" i="0" u="none" strike="noStrike" kern="1200" dirty="0">
-                <a:solidFill>
-                  <a:schemeClr val="tx1"/>
-                </a:solidFill>
-                <a:effectLst/>
-                <a:latin typeface="+mn-lt"/>
-                <a:ea typeface="+mn-ea"/>
-                <a:cs typeface="+mn-cs"/>
-              </a:rPr>
-              <a:t>Photo by </a:t>
-            </a:r>
-            <a:r>
-              <a:rPr lang="en-ID" sz="1200" b="1" i="0" u="none" strike="noStrike" kern="1200" dirty="0">
-                <a:solidFill>
-                  <a:schemeClr val="tx1"/>
-                </a:solidFill>
-                <a:effectLst/>
-                <a:latin typeface="+mn-lt"/>
-                <a:ea typeface="+mn-ea"/>
-                <a:cs typeface="+mn-cs"/>
-                <a:hlinkClick r:id="rId3"/>
-              </a:rPr>
-              <a:t>JESHOOTS.com</a:t>
-            </a:r>
-            <a:r>
-              <a:rPr lang="en-ID" sz="1200" b="0" i="0" u="none" strike="noStrike" kern="1200" dirty="0">
-                <a:solidFill>
-                  <a:schemeClr val="tx1"/>
-                </a:solidFill>
-                <a:effectLst/>
-                <a:latin typeface="+mn-lt"/>
-                <a:ea typeface="+mn-ea"/>
-                <a:cs typeface="+mn-cs"/>
-              </a:rPr>
-              <a:t> from </a:t>
-            </a:r>
-            <a:r>
-              <a:rPr lang="en-ID" sz="1200" b="1" i="0" u="none" strike="noStrike" kern="1200" dirty="0">
-                <a:solidFill>
-                  <a:schemeClr val="tx1"/>
-                </a:solidFill>
-                <a:effectLst/>
-                <a:latin typeface="+mn-lt"/>
-                <a:ea typeface="+mn-ea"/>
-                <a:cs typeface="+mn-cs"/>
-                <a:hlinkClick r:id="rId4"/>
-              </a:rPr>
-              <a:t>Pexels</a:t>
-            </a:r>
             <a:endParaRPr lang="en-US" dirty="0"/>
           </a:p>
         </p:txBody>
@@ -1318,6 +1081,198 @@
     <p:extLst>
       <p:ext uri="{BB962C8B-B14F-4D97-AF65-F5344CB8AC3E}">
         <p14:creationId xmlns:p14="http://schemas.microsoft.com/office/powerpoint/2010/main" val="1350965705"/>
+      </p:ext>
+    </p:extLst>
+  </p:cSld>
+  <p:clrMapOvr>
+    <a:masterClrMapping/>
+  </p:clrMapOvr>
+</p:notes>
+</file>
+
+<file path=ppt/notesSlides/notesSlide5.xml><?xml version="1.0" encoding="utf-8"?>
+<p:notes xmlns:a="http://schemas.openxmlformats.org/drawingml/2006/main" xmlns:r="http://schemas.openxmlformats.org/officeDocument/2006/relationships" xmlns:p="http://schemas.openxmlformats.org/presentationml/2006/main">
+  <p:cSld>
+    <p:spTree>
+      <p:nvGrpSpPr>
+        <p:cNvPr id="1" name="">
+          <a:extLst>
+            <a:ext uri="{FF2B5EF4-FFF2-40B4-BE49-F238E27FC236}">
+              <a16:creationId xmlns:a16="http://schemas.microsoft.com/office/drawing/2014/main" id="{CBA99D3A-B536-2D92-FDE7-CF34A1594B78}"/>
+            </a:ext>
+          </a:extLst>
+        </p:cNvPr>
+        <p:cNvGrpSpPr/>
+        <p:nvPr/>
+      </p:nvGrpSpPr>
+      <p:grpSpPr>
+        <a:xfrm>
+          <a:off x="0" y="0"/>
+          <a:ext cx="0" cy="0"/>
+          <a:chOff x="0" y="0"/>
+          <a:chExt cx="0" cy="0"/>
+        </a:xfrm>
+      </p:grpSpPr>
+      <p:sp>
+        <p:nvSpPr>
+          <p:cNvPr id="2" name="Slide Image Placeholder 1">
+            <a:extLst>
+              <a:ext uri="{FF2B5EF4-FFF2-40B4-BE49-F238E27FC236}">
+                <a16:creationId xmlns:a16="http://schemas.microsoft.com/office/drawing/2014/main" id="{A4C16AA3-CD7D-AD6F-C44A-983B36A7271C}"/>
+              </a:ext>
+            </a:extLst>
+          </p:cNvPr>
+          <p:cNvSpPr>
+            <a:spLocks noGrp="1" noRot="1" noChangeAspect="1"/>
+          </p:cNvSpPr>
+          <p:nvPr>
+            <p:ph type="sldImg"/>
+          </p:nvPr>
+        </p:nvSpPr>
+        <p:spPr/>
+      </p:sp>
+      <p:sp>
+        <p:nvSpPr>
+          <p:cNvPr id="3" name="Notes Placeholder 2">
+            <a:extLst>
+              <a:ext uri="{FF2B5EF4-FFF2-40B4-BE49-F238E27FC236}">
+                <a16:creationId xmlns:a16="http://schemas.microsoft.com/office/drawing/2014/main" id="{52BC7E36-9329-678E-5B66-4BE38AE4C779}"/>
+              </a:ext>
+            </a:extLst>
+          </p:cNvPr>
+          <p:cNvSpPr>
+            <a:spLocks noGrp="1"/>
+          </p:cNvSpPr>
+          <p:nvPr>
+            <p:ph type="body" idx="1"/>
+          </p:nvPr>
+        </p:nvSpPr>
+        <p:spPr/>
+        <p:txBody>
+          <a:bodyPr/>
+          <a:lstStyle/>
+          <a:p>
+            <a:endParaRPr lang="en-US" dirty="0"/>
+          </a:p>
+        </p:txBody>
+      </p:sp>
+      <p:sp>
+        <p:nvSpPr>
+          <p:cNvPr id="4" name="Slide Number Placeholder 3">
+            <a:extLst>
+              <a:ext uri="{FF2B5EF4-FFF2-40B4-BE49-F238E27FC236}">
+                <a16:creationId xmlns:a16="http://schemas.microsoft.com/office/drawing/2014/main" id="{531C53FC-DA2E-51EB-1D89-705FD2753528}"/>
+              </a:ext>
+            </a:extLst>
+          </p:cNvPr>
+          <p:cNvSpPr>
+            <a:spLocks noGrp="1"/>
+          </p:cNvSpPr>
+          <p:nvPr>
+            <p:ph type="sldNum" sz="quarter" idx="5"/>
+          </p:nvPr>
+        </p:nvSpPr>
+        <p:spPr/>
+        <p:txBody>
+          <a:bodyPr/>
+          <a:lstStyle/>
+          <a:p>
+            <a:fld id="{8ECE837E-594B-4F0F-92F5-F20D4296AC5C}" type="slidenum">
+              <a:rPr lang="en-ID" smtClean="0"/>
+              <a:t>5</a:t>
+            </a:fld>
+            <a:endParaRPr lang="en-ID"/>
+          </a:p>
+        </p:txBody>
+      </p:sp>
+    </p:spTree>
+    <p:extLst>
+      <p:ext uri="{BB962C8B-B14F-4D97-AF65-F5344CB8AC3E}">
+        <p14:creationId xmlns:p14="http://schemas.microsoft.com/office/powerpoint/2010/main" val="2953862693"/>
+      </p:ext>
+    </p:extLst>
+  </p:cSld>
+  <p:clrMapOvr>
+    <a:masterClrMapping/>
+  </p:clrMapOvr>
+</p:notes>
+</file>
+
+<file path=ppt/notesSlides/notesSlide6.xml><?xml version="1.0" encoding="utf-8"?>
+<p:notes xmlns:a="http://schemas.openxmlformats.org/drawingml/2006/main" xmlns:r="http://schemas.openxmlformats.org/officeDocument/2006/relationships" xmlns:p="http://schemas.openxmlformats.org/presentationml/2006/main">
+  <p:cSld>
+    <p:spTree>
+      <p:nvGrpSpPr>
+        <p:cNvPr id="1" name=""/>
+        <p:cNvGrpSpPr/>
+        <p:nvPr/>
+      </p:nvGrpSpPr>
+      <p:grpSpPr>
+        <a:xfrm>
+          <a:off x="0" y="0"/>
+          <a:ext cx="0" cy="0"/>
+          <a:chOff x="0" y="0"/>
+          <a:chExt cx="0" cy="0"/>
+        </a:xfrm>
+      </p:grpSpPr>
+      <p:sp>
+        <p:nvSpPr>
+          <p:cNvPr id="2" name="幻灯片图像占位符 1"/>
+          <p:cNvSpPr>
+            <a:spLocks noGrp="1" noRot="1" noChangeAspect="1"/>
+          </p:cNvSpPr>
+          <p:nvPr>
+            <p:ph type="sldImg"/>
+          </p:nvPr>
+        </p:nvSpPr>
+        <p:spPr/>
+      </p:sp>
+      <p:sp>
+        <p:nvSpPr>
+          <p:cNvPr id="3" name="备注占位符 2"/>
+          <p:cNvSpPr>
+            <a:spLocks noGrp="1"/>
+          </p:cNvSpPr>
+          <p:nvPr>
+            <p:ph type="body" idx="1"/>
+          </p:nvPr>
+        </p:nvSpPr>
+        <p:spPr/>
+        <p:txBody>
+          <a:bodyPr/>
+          <a:lstStyle/>
+          <a:p>
+            <a:endParaRPr lang="zh-CN" altLang="en-US" dirty="0"/>
+          </a:p>
+        </p:txBody>
+      </p:sp>
+      <p:sp>
+        <p:nvSpPr>
+          <p:cNvPr id="4" name="灯片编号占位符 3"/>
+          <p:cNvSpPr>
+            <a:spLocks noGrp="1"/>
+          </p:cNvSpPr>
+          <p:nvPr>
+            <p:ph type="sldNum" sz="quarter" idx="5"/>
+          </p:nvPr>
+        </p:nvSpPr>
+        <p:spPr/>
+        <p:txBody>
+          <a:bodyPr/>
+          <a:lstStyle/>
+          <a:p>
+            <a:fld id="{8ECE837E-594B-4F0F-92F5-F20D4296AC5C}" type="slidenum">
+              <a:rPr lang="en-ID" smtClean="0"/>
+              <a:t>9</a:t>
+            </a:fld>
+            <a:endParaRPr lang="en-ID"/>
+          </a:p>
+        </p:txBody>
+      </p:sp>
+    </p:spTree>
+    <p:extLst>
+      <p:ext uri="{BB962C8B-B14F-4D97-AF65-F5344CB8AC3E}">
+        <p14:creationId xmlns:p14="http://schemas.microsoft.com/office/powerpoint/2010/main" val="1877008342"/>
       </p:ext>
     </p:extLst>
   </p:cSld>
@@ -5472,7 +5427,7 @@
         <p:spPr>
           <a:xfrm>
             <a:off x="1321747" y="1631056"/>
-            <a:ext cx="9715409" cy="3600986"/>
+            <a:ext cx="9715409" cy="3877985"/>
           </a:xfrm>
           <a:prstGeom prst="rect">
             <a:avLst/>
@@ -5484,113 +5439,106 @@
           </a:bodyPr>
           <a:lstStyle/>
           <a:p>
-            <a:r>
-              <a:rPr lang="en-US" altLang="zh-CN" b="1" dirty="0">
-                <a:latin typeface="Calibri" panose="020F0502020204030204" pitchFamily="34" charset="0"/>
-                <a:cs typeface="Calibri" panose="020F0502020204030204" pitchFamily="34" charset="0"/>
-              </a:rPr>
+            <a:pPr>
+              <a:buNone/>
+            </a:pPr>
+            <a:r>
+              <a:rPr lang="zh-CN" altLang="zh-CN" b="1" dirty="0"/>
               <a:t>Business Problem</a:t>
             </a:r>
-          </a:p>
-          <a:p>
-            <a:r>
-              <a:rPr lang="en-US" altLang="zh-CN" dirty="0">
-                <a:latin typeface="Calibri" panose="020F0502020204030204" pitchFamily="34" charset="0"/>
-                <a:cs typeface="Calibri" panose="020F0502020204030204" pitchFamily="34" charset="0"/>
-              </a:rPr>
+            <a:br>
+              <a:rPr lang="zh-CN" altLang="zh-CN" dirty="0"/>
+            </a:br>
+            <a:r>
+              <a:rPr lang="zh-CN" altLang="zh-CN" dirty="0"/>
               <a:t>Streaming platforms compete on content volume, genre variety, and content quality.</a:t>
             </a:r>
-          </a:p>
-          <a:p>
-            <a:endParaRPr lang="en-US" altLang="zh-CN" b="1" dirty="0">
-              <a:latin typeface="Calibri" panose="020F0502020204030204" pitchFamily="34" charset="0"/>
-              <a:cs typeface="Calibri" panose="020F0502020204030204" pitchFamily="34" charset="0"/>
-            </a:endParaRPr>
-          </a:p>
-          <a:p>
-            <a:r>
-              <a:rPr lang="en-US" altLang="zh-CN" b="1" dirty="0">
-                <a:latin typeface="Calibri" panose="020F0502020204030204" pitchFamily="34" charset="0"/>
-                <a:cs typeface="Calibri" panose="020F0502020204030204" pitchFamily="34" charset="0"/>
-              </a:rPr>
+            <a:endParaRPr lang="en-US" altLang="zh-CN" dirty="0"/>
+          </a:p>
+          <a:p>
+            <a:pPr>
+              <a:buNone/>
+            </a:pPr>
+            <a:endParaRPr lang="zh-CN" altLang="zh-CN" dirty="0"/>
+          </a:p>
+          <a:p>
+            <a:pPr>
+              <a:buNone/>
+            </a:pPr>
+            <a:r>
+              <a:rPr lang="zh-CN" altLang="zh-CN" b="1" dirty="0"/>
               <a:t>Project Objective</a:t>
             </a:r>
-          </a:p>
-          <a:p>
-            <a:r>
-              <a:rPr lang="en-US" altLang="zh-CN" dirty="0">
-                <a:latin typeface="Calibri" panose="020F0502020204030204" pitchFamily="34" charset="0"/>
-                <a:cs typeface="Calibri" panose="020F0502020204030204" pitchFamily="34" charset="0"/>
-              </a:rPr>
+            <a:br>
+              <a:rPr lang="zh-CN" altLang="zh-CN" dirty="0"/>
+            </a:br>
+            <a:r>
+              <a:rPr lang="zh-CN" altLang="zh-CN" dirty="0"/>
               <a:t>Identify strategic opportunities for Netflix based on its content portfolio and competitive position.</a:t>
             </a:r>
-          </a:p>
-          <a:p>
-            <a:endParaRPr lang="en-US" altLang="zh-CN" b="1" dirty="0">
-              <a:latin typeface="Calibri" panose="020F0502020204030204" pitchFamily="34" charset="0"/>
-              <a:cs typeface="Calibri" panose="020F0502020204030204" pitchFamily="34" charset="0"/>
-            </a:endParaRPr>
-          </a:p>
-          <a:p>
-            <a:r>
-              <a:rPr lang="en-US" altLang="zh-CN" b="1" dirty="0">
-                <a:latin typeface="Calibri" panose="020F0502020204030204" pitchFamily="34" charset="0"/>
-                <a:cs typeface="Calibri" panose="020F0502020204030204" pitchFamily="34" charset="0"/>
-              </a:rPr>
+            <a:endParaRPr lang="en-US" altLang="zh-CN" dirty="0"/>
+          </a:p>
+          <a:p>
+            <a:pPr>
+              <a:buNone/>
+            </a:pPr>
+            <a:endParaRPr lang="zh-CN" altLang="zh-CN" dirty="0"/>
+          </a:p>
+          <a:p>
+            <a:pPr>
+              <a:buNone/>
+            </a:pPr>
+            <a:r>
+              <a:rPr lang="zh-CN" altLang="zh-CN" b="1" dirty="0"/>
               <a:t>Data &amp; Scope</a:t>
             </a:r>
-          </a:p>
-          <a:p>
-            <a:r>
-              <a:rPr lang="en-US" altLang="zh-CN" dirty="0">
-                <a:latin typeface="Calibri" panose="020F0502020204030204" pitchFamily="34" charset="0"/>
-                <a:cs typeface="Calibri" panose="020F0502020204030204" pitchFamily="34" charset="0"/>
-              </a:rPr>
-              <a:t>The dataset includes movies and TV shows from Netflix, Hulu, Prime Video, and Disney+.</a:t>
-            </a:r>
-          </a:p>
-          <a:p>
-            <a:endParaRPr lang="en-US" altLang="zh-CN" b="1" dirty="0">
-              <a:latin typeface="Calibri" panose="020F0502020204030204" pitchFamily="34" charset="0"/>
-              <a:cs typeface="Calibri" panose="020F0502020204030204" pitchFamily="34" charset="0"/>
-            </a:endParaRPr>
-          </a:p>
-          <a:p>
-            <a:r>
-              <a:rPr lang="en-US" altLang="zh-CN" b="1" dirty="0">
-                <a:latin typeface="Calibri" panose="020F0502020204030204" pitchFamily="34" charset="0"/>
-                <a:cs typeface="Calibri" panose="020F0502020204030204" pitchFamily="34" charset="0"/>
-              </a:rPr>
+            <a:br>
+              <a:rPr lang="zh-CN" altLang="zh-CN" dirty="0"/>
+            </a:br>
+            <a:r>
+              <a:rPr lang="zh-CN" altLang="zh-CN" dirty="0"/>
+              <a:t>The dataset covers movies and TV shows available on Netflix, Hulu, Prime Video, and Disney+.</a:t>
+            </a:r>
+            <a:endParaRPr lang="en-US" altLang="zh-CN" dirty="0"/>
+          </a:p>
+          <a:p>
+            <a:pPr>
+              <a:buNone/>
+            </a:pPr>
+            <a:endParaRPr lang="zh-CN" altLang="zh-CN" dirty="0"/>
+          </a:p>
+          <a:p>
+            <a:pPr>
+              <a:buNone/>
+            </a:pPr>
+            <a:r>
+              <a:rPr lang="zh-CN" altLang="zh-CN" b="1" dirty="0"/>
               <a:t>Analysis Focus</a:t>
             </a:r>
-          </a:p>
-          <a:p>
-            <a:r>
-              <a:rPr lang="en-US" altLang="zh-CN" dirty="0">
-                <a:latin typeface="Calibri" panose="020F0502020204030204" pitchFamily="34" charset="0"/>
-                <a:cs typeface="Calibri" panose="020F0502020204030204" pitchFamily="34" charset="0"/>
-              </a:rPr>
-              <a:t>Content volume, genre mix, release-year patterns, audience ratings, and strategic recommendation.</a:t>
-            </a:r>
-          </a:p>
-          <a:p>
-            <a:endParaRPr lang="en-US" altLang="zh-CN" b="1" dirty="0">
-              <a:latin typeface="Calibri" panose="020F0502020204030204" pitchFamily="34" charset="0"/>
-              <a:cs typeface="Calibri" panose="020F0502020204030204" pitchFamily="34" charset="0"/>
-            </a:endParaRPr>
-          </a:p>
-          <a:p>
-            <a:r>
-              <a:rPr lang="en-US" altLang="zh-CN" b="1" dirty="0">
-                <a:latin typeface="Calibri" panose="020F0502020204030204" pitchFamily="34" charset="0"/>
-                <a:cs typeface="Calibri" panose="020F0502020204030204" pitchFamily="34" charset="0"/>
-              </a:rPr>
+            <a:br>
+              <a:rPr lang="zh-CN" altLang="zh-CN" dirty="0"/>
+            </a:br>
+            <a:r>
+              <a:rPr lang="zh-CN" altLang="zh-CN" dirty="0"/>
+              <a:t>Content volume, release-year patterns, genre mix, IMDb ratings, Rotten Tomatoes scores, and strategic recommendation.</a:t>
+            </a:r>
+            <a:endParaRPr lang="en-US" altLang="zh-CN" dirty="0"/>
+          </a:p>
+          <a:p>
+            <a:pPr>
+              <a:buNone/>
+            </a:pPr>
+            <a:endParaRPr lang="zh-CN" altLang="zh-CN" dirty="0"/>
+          </a:p>
+          <a:p>
+            <a:pPr>
+              <a:buNone/>
+            </a:pPr>
+            <a:r>
+              <a:rPr lang="zh-CN" altLang="zh-CN" b="1" dirty="0"/>
               <a:t>Netflix was selected for the final platform-level strategy analysis.</a:t>
             </a:r>
-            <a:endParaRPr lang="zh-CN" altLang="zh-CN" b="1" dirty="0">
-              <a:latin typeface="Calibri" panose="020F0502020204030204" pitchFamily="34" charset="0"/>
-              <a:cs typeface="Calibri" panose="020F0502020204030204" pitchFamily="34" charset="0"/>
-            </a:endParaRPr>
+            <a:endParaRPr lang="zh-CN" altLang="zh-CN" dirty="0"/>
           </a:p>
         </p:txBody>
       </p:sp>
@@ -5812,8 +5760,8 @@
           <a:lstStyle/>
           <a:p>
             <a:r>
-              <a:rPr lang="en-US" altLang="zh-CN" dirty="0"/>
-              <a:t>Industry Landscape: Porter’s Five Forces</a:t>
+              <a:rPr lang="zh-CN" altLang="zh-CN" dirty="0"/>
+              <a:t>Industry Landscape: Five Forces</a:t>
             </a:r>
             <a:endParaRPr lang="en-US" dirty="0">
               <a:solidFill>
@@ -5840,7 +5788,7 @@
         </p:nvSpPr>
         <p:spPr>
           <a:xfrm>
-            <a:off x="1321747" y="3309007"/>
+            <a:off x="1321746" y="3429000"/>
             <a:ext cx="9715409" cy="2708434"/>
           </a:xfrm>
           <a:prstGeom prst="rect">
@@ -5936,13 +5884,13 @@
           <p:nvPr>
             <p:extLst>
               <p:ext uri="{D42A27DB-BD31-4B8C-83A1-F6EECF244321}">
-                <p14:modId xmlns:p14="http://schemas.microsoft.com/office/powerpoint/2010/main" val="1275633030"/>
+                <p14:modId xmlns:p14="http://schemas.microsoft.com/office/powerpoint/2010/main" val="965324449"/>
               </p:ext>
             </p:extLst>
           </p:nvPr>
         </p:nvGraphicFramePr>
         <p:xfrm>
-          <a:off x="1321747" y="1208777"/>
+          <a:off x="1321746" y="1297327"/>
           <a:ext cx="7225930" cy="2011680"/>
         </p:xfrm>
         <a:graphic>
@@ -5967,7 +5915,7 @@
                   </a:extLst>
                 </a:gridCol>
               </a:tblGrid>
-              <a:tr h="332678">
+              <a:tr h="314493">
                 <a:tc>
                   <a:txBody>
                     <a:bodyPr/>
@@ -6014,7 +5962,7 @@
                   </a:ext>
                 </a:extLst>
               </a:tr>
-              <a:tr h="332678">
+              <a:tr h="314493">
                 <a:tc>
                   <a:txBody>
                     <a:bodyPr/>
@@ -6063,7 +6011,7 @@
                   </a:ext>
                 </a:extLst>
               </a:tr>
-              <a:tr h="332678">
+              <a:tr h="314493">
                 <a:tc>
                   <a:txBody>
                     <a:bodyPr/>
@@ -6110,7 +6058,7 @@
                   </a:ext>
                 </a:extLst>
               </a:tr>
-              <a:tr h="332678">
+              <a:tr h="314493">
                 <a:tc>
                   <a:txBody>
                     <a:bodyPr/>
@@ -6157,7 +6105,7 @@
                   </a:ext>
                 </a:extLst>
               </a:tr>
-              <a:tr h="332678">
+              <a:tr h="314493">
                 <a:tc>
                   <a:txBody>
                     <a:bodyPr/>
@@ -6204,7 +6152,7 @@
                   </a:ext>
                 </a:extLst>
               </a:tr>
-              <a:tr h="332678">
+              <a:tr h="314493">
                 <a:tc>
                   <a:txBody>
                     <a:bodyPr/>
@@ -6668,8 +6616,8 @@
         </p:blipFill>
         <p:spPr>
           <a:xfrm>
-            <a:off x="5594138" y="1631056"/>
-            <a:ext cx="6437518" cy="2952822"/>
+            <a:off x="5676900" y="1669018"/>
+            <a:ext cx="6354756" cy="2914860"/>
           </a:xfrm>
           <a:prstGeom prst="rect">
             <a:avLst/>
@@ -6690,6 +6638,351 @@
 </file>
 
 <file path=ppt/slides/slide5.xml><?xml version="1.0" encoding="utf-8"?>
+<p:sld xmlns:a="http://schemas.openxmlformats.org/drawingml/2006/main" xmlns:r="http://schemas.openxmlformats.org/officeDocument/2006/relationships" xmlns:p="http://schemas.openxmlformats.org/presentationml/2006/main">
+  <p:cSld>
+    <p:spTree>
+      <p:nvGrpSpPr>
+        <p:cNvPr id="1" name="">
+          <a:extLst>
+            <a:ext uri="{FF2B5EF4-FFF2-40B4-BE49-F238E27FC236}">
+              <a16:creationId xmlns:a16="http://schemas.microsoft.com/office/drawing/2014/main" id="{F8242149-D445-1D0F-4FD5-D0BA8477A50E}"/>
+            </a:ext>
+          </a:extLst>
+        </p:cNvPr>
+        <p:cNvGrpSpPr/>
+        <p:nvPr/>
+      </p:nvGrpSpPr>
+      <p:grpSpPr>
+        <a:xfrm>
+          <a:off x="0" y="0"/>
+          <a:ext cx="0" cy="0"/>
+          <a:chOff x="0" y="0"/>
+          <a:chExt cx="0" cy="0"/>
+        </a:xfrm>
+      </p:grpSpPr>
+      <p:pic>
+        <p:nvPicPr>
+          <p:cNvPr id="9" name="图片 8">
+            <a:extLst>
+              <a:ext uri="{FF2B5EF4-FFF2-40B4-BE49-F238E27FC236}">
+                <a16:creationId xmlns:a16="http://schemas.microsoft.com/office/drawing/2014/main" id="{C8F19530-321D-B631-9BF7-19A21126484E}"/>
+              </a:ext>
+            </a:extLst>
+          </p:cNvPr>
+          <p:cNvPicPr>
+            <a:picLocks noChangeAspect="1"/>
+          </p:cNvPicPr>
+          <p:nvPr/>
+        </p:nvPicPr>
+        <p:blipFill>
+          <a:blip r:embed="rId5">
+            <a:extLst>
+              <a:ext uri="{28A0092B-C50C-407E-A947-70E740481C1C}">
+                <a14:useLocalDpi xmlns:a14="http://schemas.microsoft.com/office/drawing/2010/main" val="0"/>
+              </a:ext>
+            </a:extLst>
+          </a:blip>
+          <a:srcRect r="719" b="4266"/>
+          <a:stretch>
+            <a:fillRect/>
+          </a:stretch>
+        </p:blipFill>
+        <p:spPr>
+          <a:xfrm>
+            <a:off x="-1" y="0"/>
+            <a:ext cx="12192001" cy="6858000"/>
+          </a:xfrm>
+          <a:prstGeom prst="rect">
+            <a:avLst/>
+          </a:prstGeom>
+        </p:spPr>
+      </p:pic>
+      <p:graphicFrame>
+        <p:nvGraphicFramePr>
+          <p:cNvPr id="3" name="Object 2" hidden="1">
+            <a:extLst>
+              <a:ext uri="{FF2B5EF4-FFF2-40B4-BE49-F238E27FC236}">
+                <a16:creationId xmlns:a16="http://schemas.microsoft.com/office/drawing/2014/main" id="{93C97E13-CC9A-F249-6D47-7555DB720967}"/>
+              </a:ext>
+            </a:extLst>
+          </p:cNvPr>
+          <p:cNvGraphicFramePr>
+            <a:graphicFrameLocks noChangeAspect="1"/>
+          </p:cNvGraphicFramePr>
+          <p:nvPr>
+            <p:custDataLst>
+              <p:tags r:id="rId1"/>
+            </p:custDataLst>
+          </p:nvPr>
+        </p:nvGraphicFramePr>
+        <p:xfrm>
+          <a:off x="1588" y="1588"/>
+          <a:ext cx="1587" cy="1587"/>
+        </p:xfrm>
+        <a:graphic>
+          <a:graphicData uri="http://schemas.openxmlformats.org/presentationml/2006/ole">
+            <mc:AlternateContent xmlns:mc="http://schemas.openxmlformats.org/markup-compatibility/2006">
+              <mc:Choice xmlns:v="urn:schemas-microsoft-com:vml" Requires="v">
+                <p:oleObj name="think-cell Slide" r:id="rId6" imgW="7772400" imgH="10058400" progId="TCLayout.ActiveDocument.1">
+                  <p:embed/>
+                </p:oleObj>
+              </mc:Choice>
+              <mc:Fallback>
+                <p:oleObj name="think-cell Slide" r:id="rId6" imgW="7772400" imgH="10058400" progId="TCLayout.ActiveDocument.1">
+                  <p:embed/>
+                  <p:pic>
+                    <p:nvPicPr>
+                      <p:cNvPr id="3" name="Object 2" hidden="1">
+                        <a:extLst>
+                          <a:ext uri="{FF2B5EF4-FFF2-40B4-BE49-F238E27FC236}">
+                            <a16:creationId xmlns:a16="http://schemas.microsoft.com/office/drawing/2014/main" id="{18EBBCA2-2219-64CB-DC07-37BB5824B424}"/>
+                          </a:ext>
+                        </a:extLst>
+                      </p:cNvPr>
+                      <p:cNvPicPr/>
+                      <p:nvPr/>
+                    </p:nvPicPr>
+                    <p:blipFill>
+                      <a:blip r:embed="rId7"/>
+                      <a:stretch>
+                        <a:fillRect/>
+                      </a:stretch>
+                    </p:blipFill>
+                    <p:spPr>
+                      <a:xfrm>
+                        <a:off x="1588" y="1588"/>
+                        <a:ext cx="1587" cy="1587"/>
+                      </a:xfrm>
+                      <a:prstGeom prst="rect">
+                        <a:avLst/>
+                      </a:prstGeom>
+                    </p:spPr>
+                  </p:pic>
+                </p:oleObj>
+              </mc:Fallback>
+            </mc:AlternateContent>
+          </a:graphicData>
+        </a:graphic>
+      </p:graphicFrame>
+      <p:sp>
+        <p:nvSpPr>
+          <p:cNvPr id="4" name="Rectangle 3" hidden="1">
+            <a:extLst>
+              <a:ext uri="{FF2B5EF4-FFF2-40B4-BE49-F238E27FC236}">
+                <a16:creationId xmlns:a16="http://schemas.microsoft.com/office/drawing/2014/main" id="{CBBA64C5-7743-CEF4-3A42-B6F8293CC74A}"/>
+              </a:ext>
+            </a:extLst>
+          </p:cNvPr>
+          <p:cNvSpPr/>
+          <p:nvPr>
+            <p:custDataLst>
+              <p:tags r:id="rId2"/>
+            </p:custDataLst>
+          </p:nvPr>
+        </p:nvSpPr>
+        <p:spPr>
+          <a:xfrm>
+            <a:off x="0" y="0"/>
+            <a:ext cx="158750" cy="158750"/>
+          </a:xfrm>
+          <a:prstGeom prst="rect">
+            <a:avLst/>
+          </a:prstGeom>
+        </p:spPr>
+        <p:style>
+          <a:lnRef idx="2">
+            <a:schemeClr val="accent1">
+              <a:shade val="50000"/>
+            </a:schemeClr>
+          </a:lnRef>
+          <a:fillRef idx="1">
+            <a:schemeClr val="accent1"/>
+          </a:fillRef>
+          <a:effectRef idx="0">
+            <a:schemeClr val="accent1"/>
+          </a:effectRef>
+          <a:fontRef idx="minor">
+            <a:schemeClr val="lt1"/>
+          </a:fontRef>
+        </p:style>
+        <p:txBody>
+          <a:bodyPr wrap="none" lIns="0" tIns="0" rIns="0" bIns="0" numCol="1" spcCol="0" rtlCol="0" anchor="ctr" anchorCtr="0">
+            <a:noAutofit/>
+          </a:bodyPr>
+          <a:lstStyle/>
+          <a:p>
+            <a:pPr algn="ctr"/>
+            <a:endParaRPr lang="en-US" sz="5400" b="1" dirty="0">
+              <a:latin typeface="Segoe UI" panose="020B0502040204020203" pitchFamily="34" charset="0"/>
+              <a:ea typeface="+mj-ea"/>
+              <a:sym typeface="Segoe UI" panose="020B0502040204020203" pitchFamily="34" charset="0"/>
+            </a:endParaRPr>
+          </a:p>
+        </p:txBody>
+      </p:sp>
+      <p:sp>
+        <p:nvSpPr>
+          <p:cNvPr id="2" name="Title 1">
+            <a:extLst>
+              <a:ext uri="{FF2B5EF4-FFF2-40B4-BE49-F238E27FC236}">
+                <a16:creationId xmlns:a16="http://schemas.microsoft.com/office/drawing/2014/main" id="{FA667AB9-3B6C-E9F9-73E1-50D2B395341E}"/>
+              </a:ext>
+            </a:extLst>
+          </p:cNvPr>
+          <p:cNvSpPr>
+            <a:spLocks noGrp="1"/>
+          </p:cNvSpPr>
+          <p:nvPr>
+            <p:ph type="title"/>
+          </p:nvPr>
+        </p:nvSpPr>
+        <p:spPr>
+          <a:xfrm>
+            <a:off x="1321747" y="510829"/>
+            <a:ext cx="10803578" cy="609398"/>
+          </a:xfrm>
+        </p:spPr>
+        <p:txBody>
+          <a:bodyPr wrap="square" lIns="0" tIns="0" rIns="0" bIns="0">
+            <a:spAutoFit/>
+          </a:bodyPr>
+          <a:lstStyle/>
+          <a:p>
+            <a:r>
+              <a:rPr lang="zh-CN" altLang="zh-CN" dirty="0"/>
+              <a:t>Netflix Content Mix</a:t>
+            </a:r>
+            <a:endParaRPr lang="en-US" dirty="0">
+              <a:solidFill>
+                <a:schemeClr val="accent4"/>
+              </a:solidFill>
+              <a:latin typeface="Calibri" panose="020F0502020204030204" pitchFamily="34" charset="0"/>
+              <a:ea typeface="Calibri" panose="020F0502020204030204" pitchFamily="34" charset="0"/>
+              <a:cs typeface="Calibri" panose="020F0502020204030204" pitchFamily="34" charset="0"/>
+            </a:endParaRPr>
+          </a:p>
+        </p:txBody>
+      </p:sp>
+      <p:sp>
+        <p:nvSpPr>
+          <p:cNvPr id="11" name="Rectangle 10">
+            <a:extLst>
+              <a:ext uri="{FF2B5EF4-FFF2-40B4-BE49-F238E27FC236}">
+                <a16:creationId xmlns:a16="http://schemas.microsoft.com/office/drawing/2014/main" id="{B7093163-BC1F-859D-D329-69B26B5F38E1}"/>
+              </a:ext>
+            </a:extLst>
+          </p:cNvPr>
+          <p:cNvSpPr/>
+          <p:nvPr/>
+        </p:nvSpPr>
+        <p:spPr>
+          <a:xfrm>
+            <a:off x="1321747" y="4685999"/>
+            <a:ext cx="9841553" cy="830997"/>
+          </a:xfrm>
+          <a:prstGeom prst="rect">
+            <a:avLst/>
+          </a:prstGeom>
+        </p:spPr>
+        <p:txBody>
+          <a:bodyPr wrap="square" lIns="0" tIns="0" rIns="0" bIns="0" anchor="t">
+            <a:spAutoFit/>
+          </a:bodyPr>
+          <a:lstStyle/>
+          <a:p>
+            <a:r>
+              <a:rPr lang="zh-CN" altLang="zh-CN" dirty="0"/>
+              <a:t>Movies make up about two-thirds of Netflix’s catalog. Drama film and reality television are the two largest genre categories. Since movies represent the largest share of the catalog, improving future movie quality would strengthen a major part of Netflix’s content strategy.</a:t>
+            </a:r>
+          </a:p>
+        </p:txBody>
+      </p:sp>
+      <p:pic>
+        <p:nvPicPr>
+          <p:cNvPr id="13" name="图片 12">
+            <a:extLst>
+              <a:ext uri="{FF2B5EF4-FFF2-40B4-BE49-F238E27FC236}">
+                <a16:creationId xmlns:a16="http://schemas.microsoft.com/office/drawing/2014/main" id="{1325DFC3-C7C4-B00C-5382-B4D9B536D433}"/>
+              </a:ext>
+            </a:extLst>
+          </p:cNvPr>
+          <p:cNvPicPr>
+            <a:picLocks noChangeAspect="1"/>
+          </p:cNvPicPr>
+          <p:nvPr/>
+        </p:nvPicPr>
+        <p:blipFill>
+          <a:blip r:embed="rId8">
+            <a:extLst>
+              <a:ext uri="{28A0092B-C50C-407E-A947-70E740481C1C}">
+                <a14:useLocalDpi xmlns:a14="http://schemas.microsoft.com/office/drawing/2010/main" val="0"/>
+              </a:ext>
+            </a:extLst>
+          </a:blip>
+          <a:stretch>
+            <a:fillRect/>
+          </a:stretch>
+        </p:blipFill>
+        <p:spPr>
+          <a:xfrm>
+            <a:off x="6095999" y="1341003"/>
+            <a:ext cx="4215289" cy="3145271"/>
+          </a:xfrm>
+          <a:prstGeom prst="rect">
+            <a:avLst/>
+          </a:prstGeom>
+        </p:spPr>
+      </p:pic>
+      <p:pic>
+        <p:nvPicPr>
+          <p:cNvPr id="15" name="图片 14">
+            <a:extLst>
+              <a:ext uri="{FF2B5EF4-FFF2-40B4-BE49-F238E27FC236}">
+                <a16:creationId xmlns:a16="http://schemas.microsoft.com/office/drawing/2014/main" id="{69D85125-A63A-E828-150A-45DF2478CB07}"/>
+              </a:ext>
+            </a:extLst>
+          </p:cNvPr>
+          <p:cNvPicPr>
+            <a:picLocks noChangeAspect="1"/>
+          </p:cNvPicPr>
+          <p:nvPr/>
+        </p:nvPicPr>
+        <p:blipFill>
+          <a:blip r:embed="rId9">
+            <a:extLst>
+              <a:ext uri="{28A0092B-C50C-407E-A947-70E740481C1C}">
+                <a14:useLocalDpi xmlns:a14="http://schemas.microsoft.com/office/drawing/2010/main" val="0"/>
+              </a:ext>
+            </a:extLst>
+          </a:blip>
+          <a:stretch>
+            <a:fillRect/>
+          </a:stretch>
+        </p:blipFill>
+        <p:spPr>
+          <a:xfrm>
+            <a:off x="1321747" y="1341004"/>
+            <a:ext cx="4215289" cy="3145271"/>
+          </a:xfrm>
+          <a:prstGeom prst="rect">
+            <a:avLst/>
+          </a:prstGeom>
+        </p:spPr>
+      </p:pic>
+    </p:spTree>
+    <p:extLst>
+      <p:ext uri="{BB962C8B-B14F-4D97-AF65-F5344CB8AC3E}">
+        <p14:creationId xmlns:p14="http://schemas.microsoft.com/office/powerpoint/2010/main" val="3532243217"/>
+      </p:ext>
+    </p:extLst>
+  </p:cSld>
+  <p:clrMapOvr>
+    <a:masterClrMapping/>
+  </p:clrMapOvr>
+</p:sld>
+</file>
+
+<file path=ppt/slides/slide6.xml><?xml version="1.0" encoding="utf-8"?>
 <p:sld xmlns:a="http://schemas.openxmlformats.org/drawingml/2006/main" xmlns:r="http://schemas.openxmlformats.org/officeDocument/2006/relationships" xmlns:p="http://schemas.openxmlformats.org/presentationml/2006/main">
   <p:cSld>
     <p:spTree>
@@ -6859,7 +7152,7 @@
         </p:nvSpPr>
         <p:spPr>
           <a:xfrm>
-            <a:off x="1130781" y="1258738"/>
+            <a:off x="1130780" y="1382286"/>
             <a:ext cx="4071448" cy="4093428"/>
           </a:xfrm>
           <a:prstGeom prst="rect">
@@ -6887,7 +7180,7 @@
             </a:br>
             <a:r>
               <a:rPr lang="zh-CN" altLang="zh-CN" sz="1400" dirty="0"/>
-              <a:t>Netflix has a large content library, with around 3,700 movies and 2,000 TV shows. It is one of the biggest platforms in this comparison.</a:t>
+              <a:t>Netflix has one of the largest content libraries in the comparison, with about 3.7K movies and 2.0K TV shows.</a:t>
             </a:r>
           </a:p>
           <a:p>
@@ -6913,7 +7206,7 @@
             </a:br>
             <a:r>
               <a:rPr lang="zh-CN" altLang="zh-CN" sz="1400" dirty="0"/>
-              <a:t>This gives Netflix more choices for different users and helps it meet different viewing needs.</a:t>
+              <a:t>Its large catalog gives viewers more choices across movies and TV shows.</a:t>
             </a:r>
             <a:endParaRPr lang="en-US" altLang="zh-CN" sz="1400" dirty="0"/>
           </a:p>
@@ -6936,7 +7229,7 @@
             </a:br>
             <a:r>
               <a:rPr lang="zh-CN" altLang="zh-CN" sz="1400" dirty="0"/>
-              <a:t>Netflix already has a strong content volume, so simply adding more titles may not create a big advantage.</a:t>
+              <a:t>Netflix already has a large movie catalog, so adding more movies alone may not create a strong competitive advantage.</a:t>
             </a:r>
           </a:p>
           <a:p>
@@ -6949,7 +7242,7 @@
             </a:br>
             <a:r>
               <a:rPr lang="zh-CN" altLang="zh-CN" sz="1400" dirty="0"/>
-              <a:t>Netflix should focus more on improving the quality of its movies and shows instead of only increasing the number of titles.</a:t>
+              <a:t>Netflix should place more emphasis on the quality of future movie investments rather than continuing to expand movie volume.</a:t>
             </a:r>
           </a:p>
         </p:txBody>
@@ -7003,7 +7296,7 @@
 </p:sld>
 </file>
 
-<file path=ppt/slides/slide6.xml><?xml version="1.0" encoding="utf-8"?>
+<file path=ppt/slides/slide7.xml><?xml version="1.0" encoding="utf-8"?>
 <p:sld xmlns:a="http://schemas.openxmlformats.org/drawingml/2006/main" xmlns:r="http://schemas.openxmlformats.org/officeDocument/2006/relationships" xmlns:p="http://schemas.openxmlformats.org/presentationml/2006/main">
   <p:cSld>
     <p:spTree>
@@ -7180,8 +7473,8 @@
         </p:nvSpPr>
         <p:spPr>
           <a:xfrm>
-            <a:off x="1130781" y="1258738"/>
-            <a:ext cx="4071448" cy="4739759"/>
+            <a:off x="1130781" y="1366460"/>
+            <a:ext cx="4071448" cy="4524315"/>
           </a:xfrm>
           <a:prstGeom prst="rect">
             <a:avLst/>
@@ -7208,7 +7501,7 @@
             </a:br>
             <a:r>
               <a:rPr lang="zh-CN" altLang="zh-CN" sz="1400" dirty="0"/>
-              <a:t>Netflix’s average movie score is around 54, which is lower than Hulu at around 60 and Disney+ at around 58.</a:t>
+              <a:t>Netflix’s average movie Rotten Tomatoes score is 54.4, below Hulu at 60.4 and Disney+ at 58.3.</a:t>
             </a:r>
           </a:p>
           <a:p>
@@ -7234,12 +7527,11 @@
             </a:br>
             <a:r>
               <a:rPr lang="zh-CN" altLang="zh-CN" sz="1400" dirty="0"/>
-              <a:t>Netflix has a large library, but some competitors may look stronger in movie quality.</a:t>
-            </a:r>
-            <a:endParaRPr lang="en-US" altLang="zh-CN" sz="1400" dirty="0"/>
-          </a:p>
-          <a:p>
-            <a:endParaRPr lang="zh-CN" altLang="zh-CN" sz="1400" dirty="0"/>
+              <a:t>The weakness is concentrated in movie quality, since Netflix remains competitive in average TV-show ratings.</a:t>
+            </a:r>
+          </a:p>
+          <a:p>
+            <a:endParaRPr lang="en-US" altLang="zh-CN" sz="1400" b="1" dirty="0"/>
           </a:p>
           <a:p>
             <a:r>
@@ -7257,7 +7549,7 @@
             </a:br>
             <a:r>
               <a:rPr lang="zh-CN" altLang="zh-CN" sz="1400" dirty="0"/>
-              <a:t>Netflix faces competition from both quantity and quality. Prime Video has more movies, while Hulu has a higher average movie score.</a:t>
+              <a:t>Prime Video has more movies, while Hulu has the highest average movie rating in the comparison.</a:t>
             </a:r>
           </a:p>
           <a:p>
@@ -7270,7 +7562,7 @@
             </a:br>
             <a:r>
               <a:rPr lang="zh-CN" altLang="zh-CN" sz="1400" dirty="0"/>
-              <a:t>Content Volume Comparison (Fig. 6.2, previous slide) and Average Rotten Tomatoes Comparison (Fig. 6.5)</a:t>
+              <a:t>Content Volume Comparison (Fig. 6.2) and Average Rotten Tomatoes Comparison (Fig. 6.5)</a:t>
             </a:r>
           </a:p>
           <a:p>
@@ -7283,7 +7575,7 @@
             </a:br>
             <a:r>
               <a:rPr lang="zh-CN" altLang="zh-CN" sz="1400" dirty="0"/>
-              <a:t>Since users can easily switch platforms, they may choose another platform for either more content or higher-rated movies.</a:t>
+              <a:t>Netflix may lose movie-focused viewers to competitors offering either a larger movie catalog or stronger-rated movies.</a:t>
             </a:r>
           </a:p>
         </p:txBody>
@@ -7337,7 +7629,7 @@
 </p:sld>
 </file>
 
-<file path=ppt/slides/slide7.xml><?xml version="1.0" encoding="utf-8"?>
+<file path=ppt/slides/slide8.xml><?xml version="1.0" encoding="utf-8"?>
 <p:sld xmlns:a="http://schemas.openxmlformats.org/drawingml/2006/main" xmlns:r="http://schemas.openxmlformats.org/officeDocument/2006/relationships" xmlns:p="http://schemas.openxmlformats.org/presentationml/2006/main">
   <p:cSld>
     <p:spTree>
@@ -7514,8 +7806,8 @@
         </p:nvSpPr>
         <p:spPr>
           <a:xfrm>
-            <a:off x="1201288" y="1261674"/>
-            <a:ext cx="9555637" cy="4062651"/>
+            <a:off x="846962" y="3714851"/>
+            <a:ext cx="10601326" cy="2215991"/>
           </a:xfrm>
           <a:prstGeom prst="rect">
             <a:avLst/>
@@ -7528,28 +7820,592 @@
           <a:lstStyle/>
           <a:p>
             <a:r>
-              <a:rPr lang="en-US" altLang="zh-CN" sz="2400" dirty="0"/>
-              <a:t>Based on the SWOT analysis, Netflix should shift future content investment away from catalog expansion and toward improving the quality of future movies and shows added to its catalog.</a:t>
-            </a:r>
-          </a:p>
-          <a:p>
-            <a:endParaRPr lang="en-US" altLang="zh-CN" sz="2400" dirty="0"/>
-          </a:p>
-          <a:p>
-            <a:r>
-              <a:rPr lang="zh-CN" altLang="zh-CN" sz="2400" dirty="0"/>
-              <a:t>This recommendation is supported by Netflix’s large content library and its lower average Rotten Tomatoes movie score compared with Hulu and Disney+.</a:t>
-            </a:r>
-            <a:endParaRPr lang="en-US" altLang="zh-CN" sz="2400" dirty="0"/>
-          </a:p>
-          <a:p>
-            <a:endParaRPr lang="zh-CN" altLang="zh-CN" sz="2400" dirty="0"/>
-          </a:p>
-          <a:p>
-            <a:r>
-              <a:rPr lang="zh-CN" altLang="zh-CN" sz="2400" dirty="0"/>
-              <a:t>The expected outcome would be better overall content quality, a better viewing experience, and a stronger competitive position in the streaming market.</a:t>
-            </a:r>
+              <a:rPr lang="zh-CN" altLang="zh-CN" dirty="0"/>
+              <a:t>Based on the SWOT analysis, Netflix should invest less in expanding its movie catalog and focus more on the quality of future movie releases.</a:t>
+            </a:r>
+            <a:endParaRPr lang="en-US" altLang="zh-CN" dirty="0"/>
+          </a:p>
+          <a:p>
+            <a:endParaRPr lang="zh-CN" altLang="zh-CN" dirty="0"/>
+          </a:p>
+          <a:p>
+            <a:r>
+              <a:rPr lang="zh-CN" altLang="zh-CN" dirty="0"/>
+              <a:t>This recommendation is supported by Netflix’s large movie catalog and its lower average movie scores compared with Hulu and Disney+.</a:t>
+            </a:r>
+            <a:endParaRPr lang="en-US" altLang="zh-CN" dirty="0"/>
+          </a:p>
+          <a:p>
+            <a:endParaRPr lang="zh-CN" altLang="zh-CN" dirty="0"/>
+          </a:p>
+          <a:p>
+            <a:r>
+              <a:rPr lang="zh-CN" altLang="zh-CN" dirty="0"/>
+              <a:t>The expected outcome would be higher-quality future movies and a stronger competitive position in the streaming market.</a:t>
+            </a:r>
+          </a:p>
+        </p:txBody>
+      </p:sp>
+      <p:graphicFrame>
+        <p:nvGraphicFramePr>
+          <p:cNvPr id="6" name="表格 5">
+            <a:extLst>
+              <a:ext uri="{FF2B5EF4-FFF2-40B4-BE49-F238E27FC236}">
+                <a16:creationId xmlns:a16="http://schemas.microsoft.com/office/drawing/2014/main" id="{3833D0A9-C2B5-4D81-6A0A-B3A4743E4CB6}"/>
+              </a:ext>
+            </a:extLst>
+          </p:cNvPr>
+          <p:cNvGraphicFramePr>
+            <a:graphicFrameLocks noGrp="1"/>
+          </p:cNvGraphicFramePr>
+          <p:nvPr>
+            <p:extLst>
+              <p:ext uri="{D42A27DB-BD31-4B8C-83A1-F6EECF244321}">
+                <p14:modId xmlns:p14="http://schemas.microsoft.com/office/powerpoint/2010/main" val="2548972920"/>
+              </p:ext>
+            </p:extLst>
+          </p:nvPr>
+        </p:nvGraphicFramePr>
+        <p:xfrm>
+          <a:off x="795336" y="1295400"/>
+          <a:ext cx="10601325" cy="1861625"/>
+        </p:xfrm>
+        <a:graphic>
+          <a:graphicData uri="http://schemas.openxmlformats.org/drawingml/2006/table">
+            <a:tbl>
+              <a:tblPr firstRow="1" bandRow="1">
+                <a:tableStyleId>{5C22544A-7EE6-4342-B048-85BDC9FD1C3A}</a:tableStyleId>
+              </a:tblPr>
+              <a:tblGrid>
+                <a:gridCol w="2120265">
+                  <a:extLst>
+                    <a:ext uri="{9D8B030D-6E8A-4147-A177-3AD203B41FA5}">
+                      <a16:colId xmlns:a16="http://schemas.microsoft.com/office/drawing/2014/main" val="899616705"/>
+                    </a:ext>
+                  </a:extLst>
+                </a:gridCol>
+                <a:gridCol w="2120265">
+                  <a:extLst>
+                    <a:ext uri="{9D8B030D-6E8A-4147-A177-3AD203B41FA5}">
+                      <a16:colId xmlns:a16="http://schemas.microsoft.com/office/drawing/2014/main" val="1240835826"/>
+                    </a:ext>
+                  </a:extLst>
+                </a:gridCol>
+                <a:gridCol w="2120265">
+                  <a:extLst>
+                    <a:ext uri="{9D8B030D-6E8A-4147-A177-3AD203B41FA5}">
+                      <a16:colId xmlns:a16="http://schemas.microsoft.com/office/drawing/2014/main" val="1215633535"/>
+                    </a:ext>
+                  </a:extLst>
+                </a:gridCol>
+                <a:gridCol w="2120265">
+                  <a:extLst>
+                    <a:ext uri="{9D8B030D-6E8A-4147-A177-3AD203B41FA5}">
+                      <a16:colId xmlns:a16="http://schemas.microsoft.com/office/drawing/2014/main" val="1450080437"/>
+                    </a:ext>
+                  </a:extLst>
+                </a:gridCol>
+                <a:gridCol w="2120265">
+                  <a:extLst>
+                    <a:ext uri="{9D8B030D-6E8A-4147-A177-3AD203B41FA5}">
+                      <a16:colId xmlns:a16="http://schemas.microsoft.com/office/drawing/2014/main" val="2797011532"/>
+                    </a:ext>
+                  </a:extLst>
+                </a:gridCol>
+              </a:tblGrid>
+              <a:tr h="372325">
+                <a:tc>
+                  <a:txBody>
+                    <a:bodyPr/>
+                    <a:lstStyle/>
+                    <a:p>
+                      <a:pPr>
+                        <a:buNone/>
+                      </a:pPr>
+                      <a:r>
+                        <a:rPr lang="zh-CN" sz="1600" dirty="0"/>
+                        <a:t>Platform</a:t>
+                      </a:r>
+                    </a:p>
+                  </a:txBody>
+                  <a:tcPr anchor="ctr"/>
+                </a:tc>
+                <a:tc>
+                  <a:txBody>
+                    <a:bodyPr/>
+                    <a:lstStyle/>
+                    <a:p>
+                      <a:pPr>
+                        <a:buNone/>
+                      </a:pPr>
+                      <a:r>
+                        <a:rPr lang="zh-CN" sz="1600" dirty="0"/>
+                        <a:t>Movie Titles</a:t>
+                      </a:r>
+                    </a:p>
+                  </a:txBody>
+                  <a:tcPr anchor="ctr"/>
+                </a:tc>
+                <a:tc>
+                  <a:txBody>
+                    <a:bodyPr/>
+                    <a:lstStyle/>
+                    <a:p>
+                      <a:pPr>
+                        <a:buNone/>
+                      </a:pPr>
+                      <a:r>
+                        <a:rPr lang="zh-CN" sz="1600"/>
+                        <a:t>TV Show Titles</a:t>
+                      </a:r>
+                    </a:p>
+                  </a:txBody>
+                  <a:tcPr anchor="ctr"/>
+                </a:tc>
+                <a:tc>
+                  <a:txBody>
+                    <a:bodyPr/>
+                    <a:lstStyle/>
+                    <a:p>
+                      <a:pPr>
+                        <a:buNone/>
+                      </a:pPr>
+                      <a:r>
+                        <a:rPr lang="zh-CN" sz="1600" dirty="0"/>
+                        <a:t>Avg. Movie </a:t>
+                      </a:r>
+                      <a:r>
+                        <a:rPr lang="en-US" altLang="zh-CN" sz="1600" dirty="0"/>
+                        <a:t>RT </a:t>
+                      </a:r>
+                      <a:r>
+                        <a:rPr lang="zh-CN" sz="1600" dirty="0"/>
+                        <a:t>Score</a:t>
+                      </a:r>
+                    </a:p>
+                  </a:txBody>
+                  <a:tcPr anchor="ctr"/>
+                </a:tc>
+                <a:tc>
+                  <a:txBody>
+                    <a:bodyPr/>
+                    <a:lstStyle/>
+                    <a:p>
+                      <a:pPr>
+                        <a:buNone/>
+                      </a:pPr>
+                      <a:r>
+                        <a:rPr lang="zh-CN" sz="1600" dirty="0"/>
+                        <a:t>Avg. TV Show </a:t>
+                      </a:r>
+                      <a:r>
+                        <a:rPr lang="en-US" altLang="zh-CN" sz="1600" dirty="0"/>
+                        <a:t>RT </a:t>
+                      </a:r>
+                      <a:r>
+                        <a:rPr lang="zh-CN" sz="1600" dirty="0"/>
+                        <a:t>Score</a:t>
+                      </a:r>
+                    </a:p>
+                  </a:txBody>
+                  <a:tcPr anchor="ctr"/>
+                </a:tc>
+                <a:extLst>
+                  <a:ext uri="{0D108BD9-81ED-4DB2-BD59-A6C34878D82A}">
+                    <a16:rowId xmlns:a16="http://schemas.microsoft.com/office/drawing/2014/main" val="2992215799"/>
+                  </a:ext>
+                </a:extLst>
+              </a:tr>
+              <a:tr h="372325">
+                <a:tc>
+                  <a:txBody>
+                    <a:bodyPr/>
+                    <a:lstStyle/>
+                    <a:p>
+                      <a:pPr>
+                        <a:buNone/>
+                      </a:pPr>
+                      <a:r>
+                        <a:rPr lang="zh-CN" sz="1600" b="1" dirty="0"/>
+                        <a:t>Netflix</a:t>
+                      </a:r>
+                      <a:endParaRPr lang="zh-CN" sz="1600" dirty="0"/>
+                    </a:p>
+                  </a:txBody>
+                  <a:tcPr anchor="ctr"/>
+                </a:tc>
+                <a:tc>
+                  <a:txBody>
+                    <a:bodyPr/>
+                    <a:lstStyle/>
+                    <a:p>
+                      <a:pPr>
+                        <a:buNone/>
+                      </a:pPr>
+                      <a:r>
+                        <a:rPr lang="zh-CN" sz="1600" b="1"/>
+                        <a:t>3,695</a:t>
+                      </a:r>
+                      <a:endParaRPr lang="zh-CN" sz="1600"/>
+                    </a:p>
+                  </a:txBody>
+                  <a:tcPr anchor="ctr"/>
+                </a:tc>
+                <a:tc>
+                  <a:txBody>
+                    <a:bodyPr/>
+                    <a:lstStyle/>
+                    <a:p>
+                      <a:pPr>
+                        <a:buNone/>
+                      </a:pPr>
+                      <a:r>
+                        <a:rPr lang="zh-CN" sz="1600" b="1" dirty="0"/>
+                        <a:t>1,971</a:t>
+                      </a:r>
+                      <a:endParaRPr lang="zh-CN" sz="1600" dirty="0"/>
+                    </a:p>
+                  </a:txBody>
+                  <a:tcPr anchor="ctr"/>
+                </a:tc>
+                <a:tc>
+                  <a:txBody>
+                    <a:bodyPr/>
+                    <a:lstStyle/>
+                    <a:p>
+                      <a:pPr>
+                        <a:buNone/>
+                      </a:pPr>
+                      <a:r>
+                        <a:rPr lang="zh-CN" sz="1600" b="1"/>
+                        <a:t>54.4</a:t>
+                      </a:r>
+                      <a:endParaRPr lang="zh-CN" sz="1600"/>
+                    </a:p>
+                  </a:txBody>
+                  <a:tcPr anchor="ctr"/>
+                </a:tc>
+                <a:tc>
+                  <a:txBody>
+                    <a:bodyPr/>
+                    <a:lstStyle/>
+                    <a:p>
+                      <a:pPr>
+                        <a:buNone/>
+                      </a:pPr>
+                      <a:r>
+                        <a:rPr lang="zh-CN" sz="1600" b="1"/>
+                        <a:t>53.6</a:t>
+                      </a:r>
+                      <a:endParaRPr lang="zh-CN" sz="1600"/>
+                    </a:p>
+                  </a:txBody>
+                  <a:tcPr anchor="ctr"/>
+                </a:tc>
+                <a:extLst>
+                  <a:ext uri="{0D108BD9-81ED-4DB2-BD59-A6C34878D82A}">
+                    <a16:rowId xmlns:a16="http://schemas.microsoft.com/office/drawing/2014/main" val="3074518090"/>
+                  </a:ext>
+                </a:extLst>
+              </a:tr>
+              <a:tr h="372325">
+                <a:tc>
+                  <a:txBody>
+                    <a:bodyPr/>
+                    <a:lstStyle/>
+                    <a:p>
+                      <a:pPr>
+                        <a:buNone/>
+                      </a:pPr>
+                      <a:r>
+                        <a:rPr lang="zh-CN" sz="1600"/>
+                        <a:t>Prime Video</a:t>
+                      </a:r>
+                    </a:p>
+                  </a:txBody>
+                  <a:tcPr anchor="ctr"/>
+                </a:tc>
+                <a:tc>
+                  <a:txBody>
+                    <a:bodyPr/>
+                    <a:lstStyle/>
+                    <a:p>
+                      <a:pPr>
+                        <a:buNone/>
+                      </a:pPr>
+                      <a:r>
+                        <a:rPr lang="zh-CN" sz="1600"/>
+                        <a:t>4,113</a:t>
+                      </a:r>
+                    </a:p>
+                  </a:txBody>
+                  <a:tcPr anchor="ctr"/>
+                </a:tc>
+                <a:tc>
+                  <a:txBody>
+                    <a:bodyPr/>
+                    <a:lstStyle/>
+                    <a:p>
+                      <a:pPr>
+                        <a:buNone/>
+                      </a:pPr>
+                      <a:r>
+                        <a:rPr lang="zh-CN" sz="1600"/>
+                        <a:t>1,831</a:t>
+                      </a:r>
+                    </a:p>
+                  </a:txBody>
+                  <a:tcPr anchor="ctr"/>
+                </a:tc>
+                <a:tc>
+                  <a:txBody>
+                    <a:bodyPr/>
+                    <a:lstStyle/>
+                    <a:p>
+                      <a:pPr>
+                        <a:buNone/>
+                      </a:pPr>
+                      <a:r>
+                        <a:rPr lang="zh-CN" sz="1600"/>
+                        <a:t>50.4</a:t>
+                      </a:r>
+                    </a:p>
+                  </a:txBody>
+                  <a:tcPr anchor="ctr"/>
+                </a:tc>
+                <a:tc>
+                  <a:txBody>
+                    <a:bodyPr/>
+                    <a:lstStyle/>
+                    <a:p>
+                      <a:pPr>
+                        <a:buNone/>
+                      </a:pPr>
+                      <a:r>
+                        <a:rPr lang="zh-CN" sz="1600" dirty="0"/>
+                        <a:t>37.8</a:t>
+                      </a:r>
+                    </a:p>
+                  </a:txBody>
+                  <a:tcPr anchor="ctr"/>
+                </a:tc>
+                <a:extLst>
+                  <a:ext uri="{0D108BD9-81ED-4DB2-BD59-A6C34878D82A}">
+                    <a16:rowId xmlns:a16="http://schemas.microsoft.com/office/drawing/2014/main" val="908046194"/>
+                  </a:ext>
+                </a:extLst>
+              </a:tr>
+              <a:tr h="372325">
+                <a:tc>
+                  <a:txBody>
+                    <a:bodyPr/>
+                    <a:lstStyle/>
+                    <a:p>
+                      <a:pPr>
+                        <a:buNone/>
+                      </a:pPr>
+                      <a:r>
+                        <a:rPr lang="zh-CN" sz="1600"/>
+                        <a:t>Hulu</a:t>
+                      </a:r>
+                    </a:p>
+                  </a:txBody>
+                  <a:tcPr anchor="ctr"/>
+                </a:tc>
+                <a:tc>
+                  <a:txBody>
+                    <a:bodyPr/>
+                    <a:lstStyle/>
+                    <a:p>
+                      <a:pPr>
+                        <a:buNone/>
+                      </a:pPr>
+                      <a:r>
+                        <a:rPr lang="zh-CN" sz="1600"/>
+                        <a:t>1,047</a:t>
+                      </a:r>
+                    </a:p>
+                  </a:txBody>
+                  <a:tcPr anchor="ctr"/>
+                </a:tc>
+                <a:tc>
+                  <a:txBody>
+                    <a:bodyPr/>
+                    <a:lstStyle/>
+                    <a:p>
+                      <a:pPr>
+                        <a:buNone/>
+                      </a:pPr>
+                      <a:r>
+                        <a:rPr lang="zh-CN" sz="1600"/>
+                        <a:t>1,621</a:t>
+                      </a:r>
+                    </a:p>
+                  </a:txBody>
+                  <a:tcPr anchor="ctr"/>
+                </a:tc>
+                <a:tc>
+                  <a:txBody>
+                    <a:bodyPr/>
+                    <a:lstStyle/>
+                    <a:p>
+                      <a:pPr>
+                        <a:buNone/>
+                      </a:pPr>
+                      <a:r>
+                        <a:rPr lang="zh-CN" sz="1600"/>
+                        <a:t>60.4</a:t>
+                      </a:r>
+                    </a:p>
+                  </a:txBody>
+                  <a:tcPr anchor="ctr"/>
+                </a:tc>
+                <a:tc>
+                  <a:txBody>
+                    <a:bodyPr/>
+                    <a:lstStyle/>
+                    <a:p>
+                      <a:pPr>
+                        <a:buNone/>
+                      </a:pPr>
+                      <a:r>
+                        <a:rPr lang="zh-CN" sz="1600"/>
+                        <a:t>52.8</a:t>
+                      </a:r>
+                    </a:p>
+                  </a:txBody>
+                  <a:tcPr anchor="ctr"/>
+                </a:tc>
+                <a:extLst>
+                  <a:ext uri="{0D108BD9-81ED-4DB2-BD59-A6C34878D82A}">
+                    <a16:rowId xmlns:a16="http://schemas.microsoft.com/office/drawing/2014/main" val="1200384443"/>
+                  </a:ext>
+                </a:extLst>
+              </a:tr>
+              <a:tr h="372325">
+                <a:tc>
+                  <a:txBody>
+                    <a:bodyPr/>
+                    <a:lstStyle/>
+                    <a:p>
+                      <a:pPr>
+                        <a:buNone/>
+                      </a:pPr>
+                      <a:r>
+                        <a:rPr lang="zh-CN" sz="1600"/>
+                        <a:t>Disney+</a:t>
+                      </a:r>
+                    </a:p>
+                  </a:txBody>
+                  <a:tcPr anchor="ctr"/>
+                </a:tc>
+                <a:tc>
+                  <a:txBody>
+                    <a:bodyPr/>
+                    <a:lstStyle/>
+                    <a:p>
+                      <a:pPr>
+                        <a:buNone/>
+                      </a:pPr>
+                      <a:r>
+                        <a:rPr lang="zh-CN" sz="1600"/>
+                        <a:t>922</a:t>
+                      </a:r>
+                    </a:p>
+                  </a:txBody>
+                  <a:tcPr anchor="ctr"/>
+                </a:tc>
+                <a:tc>
+                  <a:txBody>
+                    <a:bodyPr/>
+                    <a:lstStyle/>
+                    <a:p>
+                      <a:pPr>
+                        <a:buNone/>
+                      </a:pPr>
+                      <a:r>
+                        <a:rPr lang="zh-CN" sz="1600"/>
+                        <a:t>351</a:t>
+                      </a:r>
+                    </a:p>
+                  </a:txBody>
+                  <a:tcPr anchor="ctr"/>
+                </a:tc>
+                <a:tc>
+                  <a:txBody>
+                    <a:bodyPr/>
+                    <a:lstStyle/>
+                    <a:p>
+                      <a:pPr>
+                        <a:buNone/>
+                      </a:pPr>
+                      <a:r>
+                        <a:rPr lang="zh-CN" sz="1600"/>
+                        <a:t>58.3</a:t>
+                      </a:r>
+                    </a:p>
+                  </a:txBody>
+                  <a:tcPr anchor="ctr"/>
+                </a:tc>
+                <a:tc>
+                  <a:txBody>
+                    <a:bodyPr/>
+                    <a:lstStyle/>
+                    <a:p>
+                      <a:pPr>
+                        <a:buNone/>
+                      </a:pPr>
+                      <a:r>
+                        <a:rPr lang="zh-CN" sz="1600" dirty="0"/>
+                        <a:t>49.4</a:t>
+                      </a:r>
+                    </a:p>
+                  </a:txBody>
+                  <a:tcPr anchor="ctr"/>
+                </a:tc>
+                <a:extLst>
+                  <a:ext uri="{0D108BD9-81ED-4DB2-BD59-A6C34878D82A}">
+                    <a16:rowId xmlns:a16="http://schemas.microsoft.com/office/drawing/2014/main" val="1904892537"/>
+                  </a:ext>
+                </a:extLst>
+              </a:tr>
+            </a:tbl>
+          </a:graphicData>
+        </a:graphic>
+      </p:graphicFrame>
+      <p:sp>
+        <p:nvSpPr>
+          <p:cNvPr id="8" name="文本框 7">
+            <a:extLst>
+              <a:ext uri="{FF2B5EF4-FFF2-40B4-BE49-F238E27FC236}">
+                <a16:creationId xmlns:a16="http://schemas.microsoft.com/office/drawing/2014/main" id="{38EAB70C-8900-2EE1-0F8A-DDC7C714242B}"/>
+              </a:ext>
+            </a:extLst>
+          </p:cNvPr>
+          <p:cNvSpPr txBox="1"/>
+          <p:nvPr/>
+        </p:nvSpPr>
+        <p:spPr>
+          <a:xfrm>
+            <a:off x="795336" y="3157025"/>
+            <a:ext cx="9972674" cy="307777"/>
+          </a:xfrm>
+          <a:prstGeom prst="rect">
+            <a:avLst/>
+          </a:prstGeom>
+          <a:noFill/>
+        </p:spPr>
+        <p:txBody>
+          <a:bodyPr wrap="square">
+            <a:spAutoFit/>
+          </a:bodyPr>
+          <a:lstStyle/>
+          <a:p>
+            <a:r>
+              <a:rPr lang="zh-CN" altLang="zh-CN" sz="1400" dirty="0"/>
+              <a:t>Source: Content Volume Comparison (Fig. 6.2) and Average Rotten Tomatoes Comparison (Fig. 6.5).</a:t>
+            </a:r>
+            <a:endParaRPr lang="zh-CN" altLang="en-US" sz="1400" dirty="0"/>
           </a:p>
         </p:txBody>
       </p:sp>
@@ -7566,7 +8422,7 @@
 </p:sld>
 </file>
 
-<file path=ppt/slides/slide8.xml><?xml version="1.0" encoding="utf-8"?>
+<file path=ppt/slides/slide9.xml><?xml version="1.0" encoding="utf-8"?>
 <p:sld xmlns:a="http://schemas.openxmlformats.org/drawingml/2006/main" xmlns:r="http://schemas.openxmlformats.org/officeDocument/2006/relationships" xmlns:p="http://schemas.openxmlformats.org/presentationml/2006/main">
   <p:cSld>
     <p:spTree>
@@ -7574,7 +8430,7 @@
         <p:cNvPr id="1" name="">
           <a:extLst>
             <a:ext uri="{FF2B5EF4-FFF2-40B4-BE49-F238E27FC236}">
-              <a16:creationId xmlns:a16="http://schemas.microsoft.com/office/drawing/2014/main" id="{BDD7D6C3-70C5-DFA8-9754-AECB2C838D6D}"/>
+              <a16:creationId xmlns:a16="http://schemas.microsoft.com/office/drawing/2014/main" id="{1EE63D9B-5616-77E1-EE18-35C88C266A36}"/>
             </a:ext>
           </a:extLst>
         </p:cNvPr>
@@ -7594,7 +8450,7 @@
           <p:cNvPr id="12" name="图片 11">
             <a:extLst>
               <a:ext uri="{FF2B5EF4-FFF2-40B4-BE49-F238E27FC236}">
-                <a16:creationId xmlns:a16="http://schemas.microsoft.com/office/drawing/2014/main" id="{11B15F79-665C-82E6-13AD-FFAC37C753B0}"/>
+                <a16:creationId xmlns:a16="http://schemas.microsoft.com/office/drawing/2014/main" id="{F08BA413-B6B2-EE45-4D55-E25DC6D797AE}"/>
               </a:ext>
             </a:extLst>
           </p:cNvPr>
@@ -7604,7 +8460,7 @@
           <p:nvPr/>
         </p:nvPicPr>
         <p:blipFill>
-          <a:blip r:embed="rId3">
+          <a:blip r:embed="rId4">
             <a:extLst>
               <a:ext uri="{28A0092B-C50C-407E-A947-70E740481C1C}">
                 <a14:useLocalDpi xmlns:a14="http://schemas.microsoft.com/office/drawing/2010/main" val="0"/>
@@ -7631,7 +8487,7 @@
           <p:cNvPr id="3" name="Object 2" hidden="1">
             <a:extLst>
               <a:ext uri="{FF2B5EF4-FFF2-40B4-BE49-F238E27FC236}">
-                <a16:creationId xmlns:a16="http://schemas.microsoft.com/office/drawing/2014/main" id="{6C7BF650-2CF3-3A51-E7FA-3E4D3F09D70B}"/>
+                <a16:creationId xmlns:a16="http://schemas.microsoft.com/office/drawing/2014/main" id="{35BDEBEF-8E43-B34C-BC69-2D37B322E71E}"/>
               </a:ext>
             </a:extLst>
           </p:cNvPr>
@@ -7652,12 +8508,12 @@
           <a:graphicData uri="http://schemas.openxmlformats.org/presentationml/2006/ole">
             <mc:AlternateContent xmlns:mc="http://schemas.openxmlformats.org/markup-compatibility/2006">
               <mc:Choice xmlns:v="urn:schemas-microsoft-com:vml" Requires="v">
-                <p:oleObj name="think-cell Slide" r:id="rId4" imgW="7772400" imgH="10058400" progId="TCLayout.ActiveDocument.1">
+                <p:oleObj name="think-cell Slide" r:id="rId5" imgW="7772400" imgH="10058400" progId="TCLayout.ActiveDocument.1">
                   <p:embed/>
                 </p:oleObj>
               </mc:Choice>
               <mc:Fallback>
-                <p:oleObj name="think-cell Slide" r:id="rId4" imgW="7772400" imgH="10058400" progId="TCLayout.ActiveDocument.1">
+                <p:oleObj name="think-cell Slide" r:id="rId5" imgW="7772400" imgH="10058400" progId="TCLayout.ActiveDocument.1">
                   <p:embed/>
                   <p:pic>
                     <p:nvPicPr>
@@ -7672,7 +8528,7 @@
                       <p:nvPr/>
                     </p:nvPicPr>
                     <p:blipFill>
-                      <a:blip r:embed="rId5"/>
+                      <a:blip r:embed="rId6"/>
                       <a:stretch>
                         <a:fillRect/>
                       </a:stretch>
@@ -7698,7 +8554,7 @@
           <p:cNvPr id="2" name="Title 1">
             <a:extLst>
               <a:ext uri="{FF2B5EF4-FFF2-40B4-BE49-F238E27FC236}">
-                <a16:creationId xmlns:a16="http://schemas.microsoft.com/office/drawing/2014/main" id="{65B2E72A-DB5B-CF67-81B4-5D89B4DB0BEC}"/>
+                <a16:creationId xmlns:a16="http://schemas.microsoft.com/office/drawing/2014/main" id="{B0E1EDE0-86A9-E789-FD60-761158CA1D19}"/>
               </a:ext>
             </a:extLst>
           </p:cNvPr>
@@ -7711,7 +8567,7 @@
         </p:nvSpPr>
         <p:spPr>
           <a:xfrm>
-            <a:off x="1130781" y="278670"/>
+            <a:off x="937245" y="274231"/>
             <a:ext cx="10317507" cy="889000"/>
           </a:xfrm>
         </p:spPr>
@@ -7722,19 +8578,65 @@
           <a:lstStyle/>
           <a:p>
             <a:r>
-              <a:rPr lang="zh-CN" altLang="zh-CN" dirty="0"/>
-              <a:t>Expected Outcome</a:t>
-            </a:r>
-            <a:endParaRPr lang="en-US" dirty="0"/>
+              <a:rPr lang="zh-CN" altLang="zh-CN" sz="3600" dirty="0"/>
+              <a:t>Expected Impact of Strategic Recommendation</a:t>
+            </a:r>
+            <a:endParaRPr lang="en-US" sz="3600" dirty="0"/>
           </a:p>
         </p:txBody>
       </p:sp>
       <p:sp>
         <p:nvSpPr>
-          <p:cNvPr id="11" name="Rectangle 10">
-            <a:extLst>
-              <a:ext uri="{FF2B5EF4-FFF2-40B4-BE49-F238E27FC236}">
-                <a16:creationId xmlns:a16="http://schemas.microsoft.com/office/drawing/2014/main" id="{0F4C6A5E-D532-98B2-4230-AF7C0FA7D00E}"/>
+          <p:cNvPr id="8" name="文本框 7">
+            <a:extLst>
+              <a:ext uri="{FF2B5EF4-FFF2-40B4-BE49-F238E27FC236}">
+                <a16:creationId xmlns:a16="http://schemas.microsoft.com/office/drawing/2014/main" id="{9A3FDCA4-D90C-C7BE-271A-F9307A01E1CE}"/>
+              </a:ext>
+            </a:extLst>
+          </p:cNvPr>
+          <p:cNvSpPr txBox="1"/>
+          <p:nvPr/>
+        </p:nvSpPr>
+        <p:spPr>
+          <a:xfrm>
+            <a:off x="878195" y="4892426"/>
+            <a:ext cx="10435605" cy="1169551"/>
+          </a:xfrm>
+          <a:prstGeom prst="rect">
+            <a:avLst/>
+          </a:prstGeom>
+          <a:noFill/>
+        </p:spPr>
+        <p:txBody>
+          <a:bodyPr wrap="square">
+            <a:spAutoFit/>
+          </a:bodyPr>
+          <a:lstStyle/>
+          <a:p>
+            <a:r>
+              <a:rPr lang="zh-CN" altLang="zh-CN" dirty="0"/>
+              <a:t>Retaining an additional 1% of paying memberships through higher-quality future movies could protect approximately $295M in annual streaming revenue.</a:t>
+            </a:r>
+            <a:endParaRPr lang="en-US" altLang="zh-CN" dirty="0"/>
+          </a:p>
+          <a:p>
+            <a:endParaRPr lang="en-US" altLang="zh-CN" dirty="0"/>
+          </a:p>
+          <a:p>
+            <a:r>
+              <a:rPr lang="zh-CN" altLang="zh-CN" sz="1400" dirty="0"/>
+              <a:t>Source: Netflix 2021 Annual Report; estimate based on an illustrative 1% retained-membership scenario.</a:t>
+            </a:r>
+            <a:endParaRPr lang="zh-CN" altLang="en-US" sz="1400" dirty="0"/>
+          </a:p>
+        </p:txBody>
+      </p:sp>
+      <p:sp>
+        <p:nvSpPr>
+          <p:cNvPr id="9" name="矩形: 圆角 8">
+            <a:extLst>
+              <a:ext uri="{FF2B5EF4-FFF2-40B4-BE49-F238E27FC236}">
+                <a16:creationId xmlns:a16="http://schemas.microsoft.com/office/drawing/2014/main" id="{C6D65A70-7EFE-29B9-E281-84E4BE5CD2BD}"/>
               </a:ext>
             </a:extLst>
           </p:cNvPr>
@@ -7743,103 +8645,431 @@
         </p:nvSpPr>
         <p:spPr>
           <a:xfrm>
-            <a:off x="1247008" y="1490007"/>
-            <a:ext cx="9555637" cy="3877985"/>
+            <a:off x="7391400" y="1752600"/>
+            <a:ext cx="3863352" cy="2893855"/>
           </a:xfrm>
-          <a:prstGeom prst="rect">
+          <a:prstGeom prst="roundRect">
+            <a:avLst/>
+          </a:prstGeom>
+          <a:gradFill flip="none" rotWithShape="1">
+            <a:gsLst>
+              <a:gs pos="0">
+                <a:schemeClr val="accent1">
+                  <a:tint val="66000"/>
+                  <a:satMod val="160000"/>
+                </a:schemeClr>
+              </a:gs>
+              <a:gs pos="50000">
+                <a:schemeClr val="accent1">
+                  <a:tint val="44500"/>
+                  <a:satMod val="160000"/>
+                </a:schemeClr>
+              </a:gs>
+              <a:gs pos="100000">
+                <a:schemeClr val="accent1">
+                  <a:tint val="23500"/>
+                  <a:satMod val="160000"/>
+                </a:schemeClr>
+              </a:gs>
+            </a:gsLst>
+            <a:lin ang="5400000" scaled="1"/>
+            <a:tileRect/>
+          </a:gradFill>
+        </p:spPr>
+        <p:style>
+          <a:lnRef idx="2">
+            <a:schemeClr val="accent1">
+              <a:shade val="15000"/>
+            </a:schemeClr>
+          </a:lnRef>
+          <a:fillRef idx="1">
+            <a:schemeClr val="accent1"/>
+          </a:fillRef>
+          <a:effectRef idx="0">
+            <a:schemeClr val="accent1"/>
+          </a:effectRef>
+          <a:fontRef idx="minor">
+            <a:schemeClr val="lt1"/>
+          </a:fontRef>
+        </p:style>
+        <p:txBody>
+          <a:bodyPr rtlCol="0" anchor="ctr"/>
+          <a:lstStyle/>
+          <a:p>
+            <a:pPr algn="ctr"/>
+            <a:r>
+              <a:rPr lang="zh-CN" altLang="zh-CN" b="1" dirty="0">
+                <a:solidFill>
+                  <a:schemeClr val="tx1"/>
+                </a:solidFill>
+              </a:rPr>
+              <a:t>Estimated Annual Streaming Revenue Protected</a:t>
+            </a:r>
+            <a:br>
+              <a:rPr lang="zh-CN" altLang="zh-CN" sz="6000" dirty="0">
+                <a:solidFill>
+                  <a:schemeClr val="tx1"/>
+                </a:solidFill>
+              </a:rPr>
+            </a:br>
+            <a:r>
+              <a:rPr lang="zh-CN" altLang="zh-CN" sz="6000" b="1" dirty="0">
+                <a:solidFill>
+                  <a:schemeClr val="tx1"/>
+                </a:solidFill>
+              </a:rPr>
+              <a:t>≈$295M</a:t>
+            </a:r>
+            <a:endParaRPr lang="zh-CN" altLang="en-US" dirty="0">
+              <a:solidFill>
+                <a:schemeClr val="tx1"/>
+              </a:solidFill>
+            </a:endParaRPr>
+          </a:p>
+        </p:txBody>
+      </p:sp>
+      <p:sp>
+        <p:nvSpPr>
+          <p:cNvPr id="10" name="矩形: 圆角 9">
+            <a:extLst>
+              <a:ext uri="{FF2B5EF4-FFF2-40B4-BE49-F238E27FC236}">
+                <a16:creationId xmlns:a16="http://schemas.microsoft.com/office/drawing/2014/main" id="{7F5BD65E-16ED-8FCA-29FD-D66D00340CD6}"/>
+              </a:ext>
+            </a:extLst>
+          </p:cNvPr>
+          <p:cNvSpPr/>
+          <p:nvPr/>
+        </p:nvSpPr>
+        <p:spPr>
+          <a:xfrm>
+            <a:off x="937246" y="1163231"/>
+            <a:ext cx="10317506" cy="467063"/>
+          </a:xfrm>
+          <a:prstGeom prst="roundRect">
             <a:avLst/>
           </a:prstGeom>
         </p:spPr>
+        <p:style>
+          <a:lnRef idx="2">
+            <a:schemeClr val="dk1">
+              <a:shade val="15000"/>
+            </a:schemeClr>
+          </a:lnRef>
+          <a:fillRef idx="1">
+            <a:schemeClr val="dk1"/>
+          </a:fillRef>
+          <a:effectRef idx="0">
+            <a:schemeClr val="dk1"/>
+          </a:effectRef>
+          <a:fontRef idx="minor">
+            <a:schemeClr val="lt1"/>
+          </a:fontRef>
+        </p:style>
         <p:txBody>
-          <a:bodyPr wrap="square" lIns="0" tIns="0" rIns="0" bIns="0" anchor="ctr">
-            <a:spAutoFit/>
-          </a:bodyPr>
+          <a:bodyPr rtlCol="0" anchor="ctr"/>
           <a:lstStyle/>
           <a:p>
-            <a:r>
-              <a:rPr lang="zh-CN" altLang="zh-CN" b="1" dirty="0"/>
-              <a:t>Content Engagement </a:t>
-            </a:r>
-            <a:endParaRPr lang="en-US" altLang="zh-CN" b="1" dirty="0"/>
-          </a:p>
-          <a:p>
-            <a:r>
-              <a:rPr lang="en-US" altLang="zh-CN" dirty="0"/>
-              <a:t>Higher-quality future titles may encourage users to watch more content.</a:t>
-            </a:r>
-          </a:p>
-          <a:p>
-            <a:endParaRPr lang="en-US" altLang="zh-CN" dirty="0"/>
-          </a:p>
-          <a:p>
-            <a:r>
-              <a:rPr lang="zh-CN" altLang="zh-CN" b="1" dirty="0"/>
-              <a:t>Retention Rate </a:t>
-            </a:r>
-            <a:endParaRPr lang="en-US" altLang="zh-CN" b="1" dirty="0"/>
-          </a:p>
-          <a:p>
-            <a:r>
-              <a:rPr lang="zh-CN" altLang="zh-CN" dirty="0"/>
-              <a:t>Better content quality may increase subscriber satisfaction and long-term retention. </a:t>
-            </a:r>
-            <a:endParaRPr lang="en-US" altLang="zh-CN" dirty="0"/>
-          </a:p>
-          <a:p>
-            <a:endParaRPr lang="en-US" altLang="zh-CN" dirty="0"/>
-          </a:p>
-          <a:p>
-            <a:r>
-              <a:rPr lang="zh-CN" altLang="zh-CN" b="1" dirty="0"/>
-              <a:t>Churn Reduction</a:t>
-            </a:r>
-            <a:endParaRPr lang="en-US" altLang="zh-CN" b="1" dirty="0"/>
-          </a:p>
-          <a:p>
-            <a:r>
-              <a:rPr lang="zh-CN" altLang="zh-CN" dirty="0"/>
-              <a:t>If users find more valuable content, they may be less likely to cancel subscriptions. </a:t>
-            </a:r>
-            <a:endParaRPr lang="en-US" altLang="zh-CN" dirty="0"/>
-          </a:p>
-          <a:p>
-            <a:endParaRPr lang="en-US" altLang="zh-CN" b="1" dirty="0"/>
-          </a:p>
-          <a:p>
-            <a:r>
-              <a:rPr lang="zh-CN" altLang="zh-CN" b="1" dirty="0"/>
-              <a:t>Brand Differentiation </a:t>
-            </a:r>
-            <a:endParaRPr lang="en-US" altLang="zh-CN" b="1" dirty="0"/>
-          </a:p>
-          <a:p>
-            <a:r>
-              <a:rPr lang="en-US" altLang="zh-CN" dirty="0"/>
-              <a:t>A stronger portfolio of high-quality content can help Netflix stand out from competitors.</a:t>
-            </a:r>
-          </a:p>
-          <a:p>
-            <a:endParaRPr lang="en-US" altLang="zh-CN" b="1" dirty="0"/>
-          </a:p>
-          <a:p>
-            <a:r>
-              <a:rPr lang="zh-CN" altLang="zh-CN" b="1" dirty="0"/>
-              <a:t>Business Impact </a:t>
-            </a:r>
-            <a:endParaRPr lang="en-US" altLang="zh-CN" b="1" dirty="0"/>
-          </a:p>
-          <a:p>
-            <a:r>
-              <a:rPr lang="zh-CN" altLang="zh-CN" dirty="0"/>
-              <a:t>The expected result could be stronger user loyalty and more stable subscription revenue.</a:t>
-            </a:r>
+            <a:pPr algn="ctr"/>
+            <a:r>
+              <a:rPr lang="zh-CN" altLang="zh-CN" sz="1400" dirty="0"/>
+              <a:t>Estimated Revenue Protected = Average Paying Memberships × Retention Scenario × Avg. Monthly Revenue per Paying Membership × 12</a:t>
+            </a:r>
+            <a:endParaRPr lang="zh-CN" altLang="en-US" sz="1400" dirty="0"/>
           </a:p>
         </p:txBody>
       </p:sp>
+      <p:graphicFrame>
+        <p:nvGraphicFramePr>
+          <p:cNvPr id="15" name="表格 14">
+            <a:extLst>
+              <a:ext uri="{FF2B5EF4-FFF2-40B4-BE49-F238E27FC236}">
+                <a16:creationId xmlns:a16="http://schemas.microsoft.com/office/drawing/2014/main" id="{BCDDAD82-936E-10FB-CBFF-E8241B83C71A}"/>
+              </a:ext>
+            </a:extLst>
+          </p:cNvPr>
+          <p:cNvGraphicFramePr>
+            <a:graphicFrameLocks noGrp="1"/>
+          </p:cNvGraphicFramePr>
+          <p:nvPr>
+            <p:extLst>
+              <p:ext uri="{D42A27DB-BD31-4B8C-83A1-F6EECF244321}">
+                <p14:modId xmlns:p14="http://schemas.microsoft.com/office/powerpoint/2010/main" val="397892789"/>
+              </p:ext>
+            </p:extLst>
+          </p:nvPr>
+        </p:nvGraphicFramePr>
+        <p:xfrm>
+          <a:off x="937245" y="1752600"/>
+          <a:ext cx="6282706" cy="3017520"/>
+        </p:xfrm>
+        <a:graphic>
+          <a:graphicData uri="http://schemas.openxmlformats.org/drawingml/2006/table">
+            <a:tbl>
+              <a:tblPr firstRow="1" bandRow="1">
+                <a:tableStyleId>{5C22544A-7EE6-4342-B048-85BDC9FD1C3A}</a:tableStyleId>
+              </a:tblPr>
+              <a:tblGrid>
+                <a:gridCol w="3141353">
+                  <a:extLst>
+                    <a:ext uri="{9D8B030D-6E8A-4147-A177-3AD203B41FA5}">
+                      <a16:colId xmlns:a16="http://schemas.microsoft.com/office/drawing/2014/main" val="4238502705"/>
+                    </a:ext>
+                  </a:extLst>
+                </a:gridCol>
+                <a:gridCol w="3141353">
+                  <a:extLst>
+                    <a:ext uri="{9D8B030D-6E8A-4147-A177-3AD203B41FA5}">
+                      <a16:colId xmlns:a16="http://schemas.microsoft.com/office/drawing/2014/main" val="4289593873"/>
+                    </a:ext>
+                  </a:extLst>
+                </a:gridCol>
+              </a:tblGrid>
+              <a:tr h="357503">
+                <a:tc>
+                  <a:txBody>
+                    <a:bodyPr/>
+                    <a:lstStyle/>
+                    <a:p>
+                      <a:pPr>
+                        <a:buNone/>
+                      </a:pPr>
+                      <a:r>
+                        <a:rPr lang="zh-CN" b="1" dirty="0"/>
+                        <a:t>Calculation Input</a:t>
+                      </a:r>
+                      <a:endParaRPr lang="zh-CN" dirty="0"/>
+                    </a:p>
+                  </a:txBody>
+                  <a:tcPr anchor="ctr"/>
+                </a:tc>
+                <a:tc>
+                  <a:txBody>
+                    <a:bodyPr/>
+                    <a:lstStyle/>
+                    <a:p>
+                      <a:pPr>
+                        <a:buNone/>
+                      </a:pPr>
+                      <a:r>
+                        <a:rPr lang="zh-CN" b="1"/>
+                        <a:t>Value</a:t>
+                      </a:r>
+                      <a:endParaRPr lang="zh-CN"/>
+                    </a:p>
+                  </a:txBody>
+                  <a:tcPr anchor="ctr"/>
+                </a:tc>
+                <a:extLst>
+                  <a:ext uri="{0D108BD9-81ED-4DB2-BD59-A6C34878D82A}">
+                    <a16:rowId xmlns:a16="http://schemas.microsoft.com/office/drawing/2014/main" val="3990182648"/>
+                  </a:ext>
+                </a:extLst>
+              </a:tr>
+              <a:tr h="357503">
+                <a:tc>
+                  <a:txBody>
+                    <a:bodyPr/>
+                    <a:lstStyle/>
+                    <a:p>
+                      <a:pPr>
+                        <a:buNone/>
+                      </a:pPr>
+                      <a:r>
+                        <a:rPr lang="zh-CN"/>
+                        <a:t>Average paying memberships</a:t>
+                      </a:r>
+                    </a:p>
+                  </a:txBody>
+                  <a:tcPr anchor="ctr"/>
+                </a:tc>
+                <a:tc>
+                  <a:txBody>
+                    <a:bodyPr/>
+                    <a:lstStyle/>
+                    <a:p>
+                      <a:pPr>
+                        <a:buNone/>
+                      </a:pPr>
+                      <a:r>
+                        <a:rPr lang="zh-CN"/>
+                        <a:t>210.8M</a:t>
+                      </a:r>
+                    </a:p>
+                  </a:txBody>
+                  <a:tcPr anchor="ctr"/>
+                </a:tc>
+                <a:extLst>
+                  <a:ext uri="{0D108BD9-81ED-4DB2-BD59-A6C34878D82A}">
+                    <a16:rowId xmlns:a16="http://schemas.microsoft.com/office/drawing/2014/main" val="4146187280"/>
+                  </a:ext>
+                </a:extLst>
+              </a:tr>
+              <a:tr h="357503">
+                <a:tc>
+                  <a:txBody>
+                    <a:bodyPr/>
+                    <a:lstStyle/>
+                    <a:p>
+                      <a:pPr>
+                        <a:buNone/>
+                      </a:pPr>
+                      <a:r>
+                        <a:rPr lang="zh-CN"/>
+                        <a:t>Illustrative retention scenario</a:t>
+                      </a:r>
+                    </a:p>
+                  </a:txBody>
+                  <a:tcPr anchor="ctr"/>
+                </a:tc>
+                <a:tc>
+                  <a:txBody>
+                    <a:bodyPr/>
+                    <a:lstStyle/>
+                    <a:p>
+                      <a:pPr>
+                        <a:buNone/>
+                      </a:pPr>
+                      <a:r>
+                        <a:rPr lang="zh-CN"/>
+                        <a:t>1%</a:t>
+                      </a:r>
+                    </a:p>
+                  </a:txBody>
+                  <a:tcPr anchor="ctr"/>
+                </a:tc>
+                <a:extLst>
+                  <a:ext uri="{0D108BD9-81ED-4DB2-BD59-A6C34878D82A}">
+                    <a16:rowId xmlns:a16="http://schemas.microsoft.com/office/drawing/2014/main" val="3897524373"/>
+                  </a:ext>
+                </a:extLst>
+              </a:tr>
+              <a:tr h="570088">
+                <a:tc>
+                  <a:txBody>
+                    <a:bodyPr/>
+                    <a:lstStyle/>
+                    <a:p>
+                      <a:pPr>
+                        <a:buNone/>
+                      </a:pPr>
+                      <a:r>
+                        <a:rPr lang="zh-CN" altLang="zh-CN" dirty="0"/>
+                        <a:t>Additional paying memberships retained</a:t>
+                      </a:r>
+                      <a:endParaRPr lang="zh-CN" dirty="0"/>
+                    </a:p>
+                  </a:txBody>
+                  <a:tcPr anchor="ctr"/>
+                </a:tc>
+                <a:tc>
+                  <a:txBody>
+                    <a:bodyPr/>
+                    <a:lstStyle/>
+                    <a:p>
+                      <a:pPr>
+                        <a:buNone/>
+                      </a:pPr>
+                      <a:r>
+                        <a:rPr lang="zh-CN" dirty="0"/>
+                        <a:t>≈2.1M</a:t>
+                      </a:r>
+                    </a:p>
+                  </a:txBody>
+                  <a:tcPr anchor="ctr"/>
+                </a:tc>
+                <a:extLst>
+                  <a:ext uri="{0D108BD9-81ED-4DB2-BD59-A6C34878D82A}">
+                    <a16:rowId xmlns:a16="http://schemas.microsoft.com/office/drawing/2014/main" val="1767377261"/>
+                  </a:ext>
+                </a:extLst>
+              </a:tr>
+              <a:tr h="625630">
+                <a:tc>
+                  <a:txBody>
+                    <a:bodyPr/>
+                    <a:lstStyle/>
+                    <a:p>
+                      <a:pPr>
+                        <a:buNone/>
+                      </a:pPr>
+                      <a:r>
+                        <a:rPr lang="zh-CN"/>
+                        <a:t>Avg. monthly revenue per paying membership</a:t>
+                      </a:r>
+                    </a:p>
+                  </a:txBody>
+                  <a:tcPr anchor="ctr"/>
+                </a:tc>
+                <a:tc>
+                  <a:txBody>
+                    <a:bodyPr/>
+                    <a:lstStyle/>
+                    <a:p>
+                      <a:pPr>
+                        <a:buNone/>
+                      </a:pPr>
+                      <a:r>
+                        <a:rPr lang="zh-CN"/>
+                        <a:t>$11.67</a:t>
+                      </a:r>
+                    </a:p>
+                  </a:txBody>
+                  <a:tcPr anchor="ctr"/>
+                </a:tc>
+                <a:extLst>
+                  <a:ext uri="{0D108BD9-81ED-4DB2-BD59-A6C34878D82A}">
+                    <a16:rowId xmlns:a16="http://schemas.microsoft.com/office/drawing/2014/main" val="2092973582"/>
+                  </a:ext>
+                </a:extLst>
+              </a:tr>
+              <a:tr h="625630">
+                <a:tc>
+                  <a:txBody>
+                    <a:bodyPr/>
+                    <a:lstStyle/>
+                    <a:p>
+                      <a:pPr>
+                        <a:buNone/>
+                      </a:pPr>
+                      <a:r>
+                        <a:rPr lang="zh-CN" altLang="zh-CN" dirty="0"/>
+                        <a:t>Annual revenue per paying membership</a:t>
+                      </a:r>
+                      <a:endParaRPr lang="zh-CN" dirty="0"/>
+                    </a:p>
+                  </a:txBody>
+                  <a:tcPr anchor="ctr"/>
+                </a:tc>
+                <a:tc>
+                  <a:txBody>
+                    <a:bodyPr/>
+                    <a:lstStyle/>
+                    <a:p>
+                      <a:pPr>
+                        <a:buNone/>
+                      </a:pPr>
+                      <a:r>
+                        <a:rPr lang="zh-CN" dirty="0"/>
+                        <a:t>$140.04</a:t>
+                      </a:r>
+                    </a:p>
+                  </a:txBody>
+                  <a:tcPr anchor="ctr"/>
+                </a:tc>
+                <a:extLst>
+                  <a:ext uri="{0D108BD9-81ED-4DB2-BD59-A6C34878D82A}">
+                    <a16:rowId xmlns:a16="http://schemas.microsoft.com/office/drawing/2014/main" val="1078033067"/>
+                  </a:ext>
+                </a:extLst>
+              </a:tr>
+            </a:tbl>
+          </a:graphicData>
+        </a:graphic>
+      </p:graphicFrame>
     </p:spTree>
     <p:extLst>
       <p:ext uri="{BB962C8B-B14F-4D97-AF65-F5344CB8AC3E}">
-        <p14:creationId xmlns:p14="http://schemas.microsoft.com/office/powerpoint/2010/main" val="693993278"/>
+        <p14:creationId xmlns:p14="http://schemas.microsoft.com/office/powerpoint/2010/main" val="3345562081"/>
       </p:ext>
     </p:extLst>
   </p:cSld>
@@ -7869,7 +9099,7 @@
 
 <file path=ppt/tags/tag12.xml><?xml version="1.0" encoding="utf-8"?>
 <p:tagLst xmlns:a="http://schemas.openxmlformats.org/drawingml/2006/main" xmlns:r="http://schemas.openxmlformats.org/officeDocument/2006/relationships" xmlns:p="http://schemas.openxmlformats.org/presentationml/2006/main">
-  <p:tag name="THINKCELLSHAPEDONOTDELETE" val="thinkcellActiveDocDoNotDelete"/>
+  <p:tag name="THINKCELLSHAPEDONOTDELETE" val="tWglcS7V6RsVPtr9.KlR1rw"/>
 </p:tagLst>
 </file>
 
@@ -7880,6 +9110,18 @@
 </file>
 
 <file path=ppt/tags/tag14.xml><?xml version="1.0" encoding="utf-8"?>
+<p:tagLst xmlns:a="http://schemas.openxmlformats.org/drawingml/2006/main" xmlns:r="http://schemas.openxmlformats.org/officeDocument/2006/relationships" xmlns:p="http://schemas.openxmlformats.org/presentationml/2006/main">
+  <p:tag name="THINKCELLSHAPEDONOTDELETE" val="thinkcellActiveDocDoNotDelete"/>
+</p:tagLst>
+</file>
+
+<file path=ppt/tags/tag15.xml><?xml version="1.0" encoding="utf-8"?>
+<p:tagLst xmlns:a="http://schemas.openxmlformats.org/drawingml/2006/main" xmlns:r="http://schemas.openxmlformats.org/officeDocument/2006/relationships" xmlns:p="http://schemas.openxmlformats.org/presentationml/2006/main">
+  <p:tag name="THINKCELLSHAPEDONOTDELETE" val="thinkcellActiveDocDoNotDelete"/>
+</p:tagLst>
+</file>
+
+<file path=ppt/tags/tag16.xml><?xml version="1.0" encoding="utf-8"?>
 <p:tagLst xmlns:a="http://schemas.openxmlformats.org/drawingml/2006/main" xmlns:r="http://schemas.openxmlformats.org/officeDocument/2006/relationships" xmlns:p="http://schemas.openxmlformats.org/presentationml/2006/main">
   <p:tag name="THINKCELLSHAPEDONOTDELETE" val="thinkcellActiveDocDoNotDelete"/>
 </p:tagLst>
